--- a/LAFO.pptx
+++ b/LAFO.pptx
@@ -5,16 +5,16 @@
     <p:sldMasterId id="2147483648" r:id="rId1"/>
   </p:sldMasterIdLst>
   <p:sldIdLst>
-    <p:sldId id="256" r:id="rId7"/>
-    <p:sldId id="257" r:id="rId8"/>
-    <p:sldId id="258" r:id="rId9"/>
-    <p:sldId id="259" r:id="rId10"/>
-    <p:sldId id="260" r:id="rId11"/>
-    <p:sldId id="261" r:id="rId12"/>
-    <p:sldId id="262" r:id="rId13"/>
-    <p:sldId id="263" r:id="rId14"/>
+    <p:sldId id="256" r:id="rId2"/>
+    <p:sldId id="257" r:id="rId3"/>
+    <p:sldId id="258" r:id="rId4"/>
+    <p:sldId id="259" r:id="rId5"/>
+    <p:sldId id="260" r:id="rId6"/>
+    <p:sldId id="261" r:id="rId7"/>
+    <p:sldId id="262" r:id="rId8"/>
+    <p:sldId id="263" r:id="rId9"/>
   </p:sldIdLst>
-  <p:sldSz cx="12191695" cy="6858000" type="screen4x3"/>
+  <p:sldSz cx="12192000" cy="6858000"/>
   <p:notesSz cx="6858000" cy="9144000"/>
   <p:defaultTextStyle>
     <a:defPPr>
@@ -111,6 +111,22 @@
       </a:defRPr>
     </a:lvl9pPr>
   </p:defaultTextStyle>
+  <p:extLst>
+    <p:ext uri="{EFAFB233-063F-42B5-8137-9DF3F51BA10A}">
+      <p15:sldGuideLst xmlns:p15="http://schemas.microsoft.com/office/powerpoint/2012/main">
+        <p15:guide id="1" orient="horz" pos="2160">
+          <p15:clr>
+            <a:srgbClr val="A4A3A4"/>
+          </p15:clr>
+        </p15:guide>
+        <p15:guide id="2" pos="2880">
+          <p15:clr>
+            <a:srgbClr val="A4A3A4"/>
+          </p15:clr>
+        </p15:guide>
+      </p15:sldGuideLst>
+    </p:ext>
+  </p:extLst>
 </p:presentation>
 </file>
 
@@ -152,10 +168,9 @@
           <a:lstStyle/>
           <a:p>
             <a:r>
-              <a:rPr lang="en-US" smtClean="0"/>
+              <a:rPr lang="en-US"/>
               <a:t>Click to edit Master title style</a:t>
             </a:r>
-            <a:endParaRPr lang="en-US"/>
           </a:p>
         </p:txBody>
       </p:sp>
@@ -271,10 +286,9 @@
           </a:lstStyle>
           <a:p>
             <a:r>
-              <a:rPr lang="en-US" smtClean="0"/>
+              <a:rPr lang="en-US"/>
               <a:t>Click to edit Master subtitle style</a:t>
             </a:r>
-            <a:endParaRPr lang="en-US"/>
           </a:p>
         </p:txBody>
       </p:sp>
@@ -295,7 +309,7 @@
           <a:p>
             <a:fld id="{5BCAD085-E8A6-8845-BD4E-CB4CCA059FC4}" type="datetimeFigureOut">
               <a:rPr lang="en-US" smtClean="0"/>
-              <a:t>1/27/13</a:t>
+              <a:t>6/17/2026</a:t>
             </a:fld>
             <a:endParaRPr lang="en-US"/>
           </a:p>
@@ -353,6 +367,9 @@
   <p:clrMapOvr>
     <a:masterClrMapping/>
   </p:clrMapOvr>
+  <p:transition spd="slow">
+    <p:wipe/>
+  </p:transition>
 </p:sldLayout>
 </file>
 
@@ -389,10 +406,9 @@
           <a:lstStyle/>
           <a:p>
             <a:r>
-              <a:rPr lang="en-US" smtClean="0"/>
+              <a:rPr lang="en-US"/>
               <a:t>Click to edit Master title style</a:t>
             </a:r>
-            <a:endParaRPr lang="en-US"/>
           </a:p>
         </p:txBody>
       </p:sp>
@@ -413,38 +429,37 @@
           <a:p>
             <a:pPr lvl="0"/>
             <a:r>
-              <a:rPr lang="en-US" smtClean="0"/>
+              <a:rPr lang="en-US"/>
               <a:t>Click to edit Master text styles</a:t>
             </a:r>
           </a:p>
           <a:p>
             <a:pPr lvl="1"/>
             <a:r>
-              <a:rPr lang="en-US" smtClean="0"/>
+              <a:rPr lang="en-US"/>
               <a:t>Second level</a:t>
             </a:r>
           </a:p>
           <a:p>
             <a:pPr lvl="2"/>
             <a:r>
-              <a:rPr lang="en-US" smtClean="0"/>
+              <a:rPr lang="en-US"/>
               <a:t>Third level</a:t>
             </a:r>
           </a:p>
           <a:p>
             <a:pPr lvl="3"/>
             <a:r>
-              <a:rPr lang="en-US" smtClean="0"/>
+              <a:rPr lang="en-US"/>
               <a:t>Fourth level</a:t>
             </a:r>
           </a:p>
           <a:p>
             <a:pPr lvl="4"/>
             <a:r>
-              <a:rPr lang="en-US" smtClean="0"/>
+              <a:rPr lang="en-US"/>
               <a:t>Fifth level</a:t>
             </a:r>
-            <a:endParaRPr lang="en-US"/>
           </a:p>
         </p:txBody>
       </p:sp>
@@ -465,7 +480,7 @@
           <a:p>
             <a:fld id="{5BCAD085-E8A6-8845-BD4E-CB4CCA059FC4}" type="datetimeFigureOut">
               <a:rPr lang="en-US" smtClean="0"/>
-              <a:t>1/27/13</a:t>
+              <a:t>6/17/2026</a:t>
             </a:fld>
             <a:endParaRPr lang="en-US"/>
           </a:p>
@@ -523,6 +538,9 @@
   <p:clrMapOvr>
     <a:masterClrMapping/>
   </p:clrMapOvr>
+  <p:transition spd="slow">
+    <p:wipe/>
+  </p:transition>
 </p:sldLayout>
 </file>
 
@@ -564,10 +582,9 @@
           <a:lstStyle/>
           <a:p>
             <a:r>
-              <a:rPr lang="en-US" smtClean="0"/>
+              <a:rPr lang="en-US"/>
               <a:t>Click to edit Master title style</a:t>
             </a:r>
-            <a:endParaRPr lang="en-US"/>
           </a:p>
         </p:txBody>
       </p:sp>
@@ -593,38 +610,37 @@
           <a:p>
             <a:pPr lvl="0"/>
             <a:r>
-              <a:rPr lang="en-US" smtClean="0"/>
+              <a:rPr lang="en-US"/>
               <a:t>Click to edit Master text styles</a:t>
             </a:r>
           </a:p>
           <a:p>
             <a:pPr lvl="1"/>
             <a:r>
-              <a:rPr lang="en-US" smtClean="0"/>
+              <a:rPr lang="en-US"/>
               <a:t>Second level</a:t>
             </a:r>
           </a:p>
           <a:p>
             <a:pPr lvl="2"/>
             <a:r>
-              <a:rPr lang="en-US" smtClean="0"/>
+              <a:rPr lang="en-US"/>
               <a:t>Third level</a:t>
             </a:r>
           </a:p>
           <a:p>
             <a:pPr lvl="3"/>
             <a:r>
-              <a:rPr lang="en-US" smtClean="0"/>
+              <a:rPr lang="en-US"/>
               <a:t>Fourth level</a:t>
             </a:r>
           </a:p>
           <a:p>
             <a:pPr lvl="4"/>
             <a:r>
-              <a:rPr lang="en-US" smtClean="0"/>
+              <a:rPr lang="en-US"/>
               <a:t>Fifth level</a:t>
             </a:r>
-            <a:endParaRPr lang="en-US"/>
           </a:p>
         </p:txBody>
       </p:sp>
@@ -645,7 +661,7 @@
           <a:p>
             <a:fld id="{5BCAD085-E8A6-8845-BD4E-CB4CCA059FC4}" type="datetimeFigureOut">
               <a:rPr lang="en-US" smtClean="0"/>
-              <a:t>1/27/13</a:t>
+              <a:t>6/17/2026</a:t>
             </a:fld>
             <a:endParaRPr lang="en-US"/>
           </a:p>
@@ -703,6 +719,9 @@
   <p:clrMapOvr>
     <a:masterClrMapping/>
   </p:clrMapOvr>
+  <p:transition spd="slow">
+    <p:wipe/>
+  </p:transition>
 </p:sldLayout>
 </file>
 
@@ -739,10 +758,9 @@
           <a:lstStyle/>
           <a:p>
             <a:r>
-              <a:rPr lang="en-US" smtClean="0"/>
+              <a:rPr lang="en-US"/>
               <a:t>Click to edit Master title style</a:t>
             </a:r>
-            <a:endParaRPr lang="en-US"/>
           </a:p>
         </p:txBody>
       </p:sp>
@@ -763,38 +781,37 @@
           <a:p>
             <a:pPr lvl="0"/>
             <a:r>
-              <a:rPr lang="en-US" smtClean="0"/>
+              <a:rPr lang="en-US"/>
               <a:t>Click to edit Master text styles</a:t>
             </a:r>
           </a:p>
           <a:p>
             <a:pPr lvl="1"/>
             <a:r>
-              <a:rPr lang="en-US" smtClean="0"/>
+              <a:rPr lang="en-US"/>
               <a:t>Second level</a:t>
             </a:r>
           </a:p>
           <a:p>
             <a:pPr lvl="2"/>
             <a:r>
-              <a:rPr lang="en-US" smtClean="0"/>
+              <a:rPr lang="en-US"/>
               <a:t>Third level</a:t>
             </a:r>
           </a:p>
           <a:p>
             <a:pPr lvl="3"/>
             <a:r>
-              <a:rPr lang="en-US" smtClean="0"/>
+              <a:rPr lang="en-US"/>
               <a:t>Fourth level</a:t>
             </a:r>
           </a:p>
           <a:p>
             <a:pPr lvl="4"/>
             <a:r>
-              <a:rPr lang="en-US" smtClean="0"/>
+              <a:rPr lang="en-US"/>
               <a:t>Fifth level</a:t>
             </a:r>
-            <a:endParaRPr lang="en-US"/>
           </a:p>
         </p:txBody>
       </p:sp>
@@ -815,7 +832,7 @@
           <a:p>
             <a:fld id="{5BCAD085-E8A6-8845-BD4E-CB4CCA059FC4}" type="datetimeFigureOut">
               <a:rPr lang="en-US" smtClean="0"/>
-              <a:t>1/27/13</a:t>
+              <a:t>6/17/2026</a:t>
             </a:fld>
             <a:endParaRPr lang="en-US"/>
           </a:p>
@@ -873,6 +890,9 @@
   <p:clrMapOvr>
     <a:masterClrMapping/>
   </p:clrMapOvr>
+  <p:transition spd="slow">
+    <p:wipe/>
+  </p:transition>
 </p:sldLayout>
 </file>
 
@@ -918,10 +938,9 @@
           </a:lstStyle>
           <a:p>
             <a:r>
-              <a:rPr lang="en-US" smtClean="0"/>
+              <a:rPr lang="en-US"/>
               <a:t>Click to edit Master title style</a:t>
             </a:r>
-            <a:endParaRPr lang="en-US"/>
           </a:p>
         </p:txBody>
       </p:sp>
@@ -1038,7 +1057,7 @@
           <a:p>
             <a:pPr lvl="0"/>
             <a:r>
-              <a:rPr lang="en-US" smtClean="0"/>
+              <a:rPr lang="en-US"/>
               <a:t>Click to edit Master text styles</a:t>
             </a:r>
           </a:p>
@@ -1061,7 +1080,7 @@
           <a:p>
             <a:fld id="{5BCAD085-E8A6-8845-BD4E-CB4CCA059FC4}" type="datetimeFigureOut">
               <a:rPr lang="en-US" smtClean="0"/>
-              <a:t>1/27/13</a:t>
+              <a:t>6/17/2026</a:t>
             </a:fld>
             <a:endParaRPr lang="en-US"/>
           </a:p>
@@ -1119,6 +1138,9 @@
   <p:clrMapOvr>
     <a:masterClrMapping/>
   </p:clrMapOvr>
+  <p:transition spd="slow">
+    <p:wipe/>
+  </p:transition>
 </p:sldLayout>
 </file>
 
@@ -1155,10 +1177,9 @@
           <a:lstStyle/>
           <a:p>
             <a:r>
-              <a:rPr lang="en-US" smtClean="0"/>
+              <a:rPr lang="en-US"/>
               <a:t>Click to edit Master title style</a:t>
             </a:r>
-            <a:endParaRPr lang="en-US"/>
           </a:p>
         </p:txBody>
       </p:sp>
@@ -1212,38 +1233,37 @@
           <a:p>
             <a:pPr lvl="0"/>
             <a:r>
-              <a:rPr lang="en-US" smtClean="0"/>
+              <a:rPr lang="en-US"/>
               <a:t>Click to edit Master text styles</a:t>
             </a:r>
           </a:p>
           <a:p>
             <a:pPr lvl="1"/>
             <a:r>
-              <a:rPr lang="en-US" smtClean="0"/>
+              <a:rPr lang="en-US"/>
               <a:t>Second level</a:t>
             </a:r>
           </a:p>
           <a:p>
             <a:pPr lvl="2"/>
             <a:r>
-              <a:rPr lang="en-US" smtClean="0"/>
+              <a:rPr lang="en-US"/>
               <a:t>Third level</a:t>
             </a:r>
           </a:p>
           <a:p>
             <a:pPr lvl="3"/>
             <a:r>
-              <a:rPr lang="en-US" smtClean="0"/>
+              <a:rPr lang="en-US"/>
               <a:t>Fourth level</a:t>
             </a:r>
           </a:p>
           <a:p>
             <a:pPr lvl="4"/>
             <a:r>
-              <a:rPr lang="en-US" smtClean="0"/>
+              <a:rPr lang="en-US"/>
               <a:t>Fifth level</a:t>
             </a:r>
-            <a:endParaRPr lang="en-US"/>
           </a:p>
         </p:txBody>
       </p:sp>
@@ -1297,38 +1317,37 @@
           <a:p>
             <a:pPr lvl="0"/>
             <a:r>
-              <a:rPr lang="en-US" smtClean="0"/>
+              <a:rPr lang="en-US"/>
               <a:t>Click to edit Master text styles</a:t>
             </a:r>
           </a:p>
           <a:p>
             <a:pPr lvl="1"/>
             <a:r>
-              <a:rPr lang="en-US" smtClean="0"/>
+              <a:rPr lang="en-US"/>
               <a:t>Second level</a:t>
             </a:r>
           </a:p>
           <a:p>
             <a:pPr lvl="2"/>
             <a:r>
-              <a:rPr lang="en-US" smtClean="0"/>
+              <a:rPr lang="en-US"/>
               <a:t>Third level</a:t>
             </a:r>
           </a:p>
           <a:p>
             <a:pPr lvl="3"/>
             <a:r>
-              <a:rPr lang="en-US" smtClean="0"/>
+              <a:rPr lang="en-US"/>
               <a:t>Fourth level</a:t>
             </a:r>
           </a:p>
           <a:p>
             <a:pPr lvl="4"/>
             <a:r>
-              <a:rPr lang="en-US" smtClean="0"/>
+              <a:rPr lang="en-US"/>
               <a:t>Fifth level</a:t>
             </a:r>
-            <a:endParaRPr lang="en-US"/>
           </a:p>
         </p:txBody>
       </p:sp>
@@ -1349,7 +1368,7 @@
           <a:p>
             <a:fld id="{5BCAD085-E8A6-8845-BD4E-CB4CCA059FC4}" type="datetimeFigureOut">
               <a:rPr lang="en-US" smtClean="0"/>
-              <a:t>1/27/13</a:t>
+              <a:t>6/17/2026</a:t>
             </a:fld>
             <a:endParaRPr lang="en-US"/>
           </a:p>
@@ -1407,6 +1426,9 @@
   <p:clrMapOvr>
     <a:masterClrMapping/>
   </p:clrMapOvr>
+  <p:transition spd="slow">
+    <p:wipe/>
+  </p:transition>
 </p:sldLayout>
 </file>
 
@@ -1447,10 +1469,9 @@
           </a:lstStyle>
           <a:p>
             <a:r>
-              <a:rPr lang="en-US" smtClean="0"/>
+              <a:rPr lang="en-US"/>
               <a:t>Click to edit Master title style</a:t>
             </a:r>
-            <a:endParaRPr lang="en-US"/>
           </a:p>
         </p:txBody>
       </p:sp>
@@ -1513,7 +1534,7 @@
           <a:p>
             <a:pPr lvl="0"/>
             <a:r>
-              <a:rPr lang="en-US" smtClean="0"/>
+              <a:rPr lang="en-US"/>
               <a:t>Click to edit Master text styles</a:t>
             </a:r>
           </a:p>
@@ -1569,38 +1590,37 @@
           <a:p>
             <a:pPr lvl="0"/>
             <a:r>
-              <a:rPr lang="en-US" smtClean="0"/>
+              <a:rPr lang="en-US"/>
               <a:t>Click to edit Master text styles</a:t>
             </a:r>
           </a:p>
           <a:p>
             <a:pPr lvl="1"/>
             <a:r>
-              <a:rPr lang="en-US" smtClean="0"/>
+              <a:rPr lang="en-US"/>
               <a:t>Second level</a:t>
             </a:r>
           </a:p>
           <a:p>
             <a:pPr lvl="2"/>
             <a:r>
-              <a:rPr lang="en-US" smtClean="0"/>
+              <a:rPr lang="en-US"/>
               <a:t>Third level</a:t>
             </a:r>
           </a:p>
           <a:p>
             <a:pPr lvl="3"/>
             <a:r>
-              <a:rPr lang="en-US" smtClean="0"/>
+              <a:rPr lang="en-US"/>
               <a:t>Fourth level</a:t>
             </a:r>
           </a:p>
           <a:p>
             <a:pPr lvl="4"/>
             <a:r>
-              <a:rPr lang="en-US" smtClean="0"/>
+              <a:rPr lang="en-US"/>
               <a:t>Fifth level</a:t>
             </a:r>
-            <a:endParaRPr lang="en-US"/>
           </a:p>
         </p:txBody>
       </p:sp>
@@ -1663,7 +1683,7 @@
           <a:p>
             <a:pPr lvl="0"/>
             <a:r>
-              <a:rPr lang="en-US" smtClean="0"/>
+              <a:rPr lang="en-US"/>
               <a:t>Click to edit Master text styles</a:t>
             </a:r>
           </a:p>
@@ -1719,38 +1739,37 @@
           <a:p>
             <a:pPr lvl="0"/>
             <a:r>
-              <a:rPr lang="en-US" smtClean="0"/>
+              <a:rPr lang="en-US"/>
               <a:t>Click to edit Master text styles</a:t>
             </a:r>
           </a:p>
           <a:p>
             <a:pPr lvl="1"/>
             <a:r>
-              <a:rPr lang="en-US" smtClean="0"/>
+              <a:rPr lang="en-US"/>
               <a:t>Second level</a:t>
             </a:r>
           </a:p>
           <a:p>
             <a:pPr lvl="2"/>
             <a:r>
-              <a:rPr lang="en-US" smtClean="0"/>
+              <a:rPr lang="en-US"/>
               <a:t>Third level</a:t>
             </a:r>
           </a:p>
           <a:p>
             <a:pPr lvl="3"/>
             <a:r>
-              <a:rPr lang="en-US" smtClean="0"/>
+              <a:rPr lang="en-US"/>
               <a:t>Fourth level</a:t>
             </a:r>
           </a:p>
           <a:p>
             <a:pPr lvl="4"/>
             <a:r>
-              <a:rPr lang="en-US" smtClean="0"/>
+              <a:rPr lang="en-US"/>
               <a:t>Fifth level</a:t>
             </a:r>
-            <a:endParaRPr lang="en-US"/>
           </a:p>
         </p:txBody>
       </p:sp>
@@ -1771,7 +1790,7 @@
           <a:p>
             <a:fld id="{5BCAD085-E8A6-8845-BD4E-CB4CCA059FC4}" type="datetimeFigureOut">
               <a:rPr lang="en-US" smtClean="0"/>
-              <a:t>1/27/13</a:t>
+              <a:t>6/17/2026</a:t>
             </a:fld>
             <a:endParaRPr lang="en-US"/>
           </a:p>
@@ -1829,6 +1848,9 @@
   <p:clrMapOvr>
     <a:masterClrMapping/>
   </p:clrMapOvr>
+  <p:transition spd="slow">
+    <p:wipe/>
+  </p:transition>
 </p:sldLayout>
 </file>
 
@@ -1865,10 +1887,9 @@
           <a:lstStyle/>
           <a:p>
             <a:r>
-              <a:rPr lang="en-US" smtClean="0"/>
+              <a:rPr lang="en-US"/>
               <a:t>Click to edit Master title style</a:t>
             </a:r>
-            <a:endParaRPr lang="en-US"/>
           </a:p>
         </p:txBody>
       </p:sp>
@@ -1889,7 +1910,7 @@
           <a:p>
             <a:fld id="{5BCAD085-E8A6-8845-BD4E-CB4CCA059FC4}" type="datetimeFigureOut">
               <a:rPr lang="en-US" smtClean="0"/>
-              <a:t>1/27/13</a:t>
+              <a:t>6/17/2026</a:t>
             </a:fld>
             <a:endParaRPr lang="en-US"/>
           </a:p>
@@ -1947,6 +1968,9 @@
   <p:clrMapOvr>
     <a:masterClrMapping/>
   </p:clrMapOvr>
+  <p:transition spd="slow">
+    <p:wipe/>
+  </p:transition>
 </p:sldLayout>
 </file>
 
@@ -1984,7 +2008,7 @@
           <a:p>
             <a:fld id="{5BCAD085-E8A6-8845-BD4E-CB4CCA059FC4}" type="datetimeFigureOut">
               <a:rPr lang="en-US" smtClean="0"/>
-              <a:t>1/27/13</a:t>
+              <a:t>6/17/2026</a:t>
             </a:fld>
             <a:endParaRPr lang="en-US"/>
           </a:p>
@@ -2042,6 +2066,9 @@
   <p:clrMapOvr>
     <a:masterClrMapping/>
   </p:clrMapOvr>
+  <p:transition spd="slow">
+    <p:wipe/>
+  </p:transition>
 </p:sldLayout>
 </file>
 
@@ -2087,10 +2114,9 @@
           </a:lstStyle>
           <a:p>
             <a:r>
-              <a:rPr lang="en-US" smtClean="0"/>
+              <a:rPr lang="en-US"/>
               <a:t>Click to edit Master title style</a:t>
             </a:r>
-            <a:endParaRPr lang="en-US"/>
           </a:p>
         </p:txBody>
       </p:sp>
@@ -2144,38 +2170,37 @@
           <a:p>
             <a:pPr lvl="0"/>
             <a:r>
-              <a:rPr lang="en-US" smtClean="0"/>
+              <a:rPr lang="en-US"/>
               <a:t>Click to edit Master text styles</a:t>
             </a:r>
           </a:p>
           <a:p>
             <a:pPr lvl="1"/>
             <a:r>
-              <a:rPr lang="en-US" smtClean="0"/>
+              <a:rPr lang="en-US"/>
               <a:t>Second level</a:t>
             </a:r>
           </a:p>
           <a:p>
             <a:pPr lvl="2"/>
             <a:r>
-              <a:rPr lang="en-US" smtClean="0"/>
+              <a:rPr lang="en-US"/>
               <a:t>Third level</a:t>
             </a:r>
           </a:p>
           <a:p>
             <a:pPr lvl="3"/>
             <a:r>
-              <a:rPr lang="en-US" smtClean="0"/>
+              <a:rPr lang="en-US"/>
               <a:t>Fourth level</a:t>
             </a:r>
           </a:p>
           <a:p>
             <a:pPr lvl="4"/>
             <a:r>
-              <a:rPr lang="en-US" smtClean="0"/>
+              <a:rPr lang="en-US"/>
               <a:t>Fifth level</a:t>
             </a:r>
-            <a:endParaRPr lang="en-US"/>
           </a:p>
         </p:txBody>
       </p:sp>
@@ -2238,7 +2263,7 @@
           <a:p>
             <a:pPr lvl="0"/>
             <a:r>
-              <a:rPr lang="en-US" smtClean="0"/>
+              <a:rPr lang="en-US"/>
               <a:t>Click to edit Master text styles</a:t>
             </a:r>
           </a:p>
@@ -2261,7 +2286,7 @@
           <a:p>
             <a:fld id="{5BCAD085-E8A6-8845-BD4E-CB4CCA059FC4}" type="datetimeFigureOut">
               <a:rPr lang="en-US" smtClean="0"/>
-              <a:t>1/27/13</a:t>
+              <a:t>6/17/2026</a:t>
             </a:fld>
             <a:endParaRPr lang="en-US"/>
           </a:p>
@@ -2319,6 +2344,9 @@
   <p:clrMapOvr>
     <a:masterClrMapping/>
   </p:clrMapOvr>
+  <p:transition spd="slow">
+    <p:wipe/>
+  </p:transition>
 </p:sldLayout>
 </file>
 
@@ -2364,10 +2392,9 @@
           </a:lstStyle>
           <a:p>
             <a:r>
-              <a:rPr lang="en-US" smtClean="0"/>
+              <a:rPr lang="en-US"/>
               <a:t>Click to edit Master title style</a:t>
             </a:r>
-            <a:endParaRPr lang="en-US"/>
           </a:p>
         </p:txBody>
       </p:sp>
@@ -2491,7 +2518,7 @@
           <a:p>
             <a:pPr lvl="0"/>
             <a:r>
-              <a:rPr lang="en-US" smtClean="0"/>
+              <a:rPr lang="en-US"/>
               <a:t>Click to edit Master text styles</a:t>
             </a:r>
           </a:p>
@@ -2514,7 +2541,7 @@
           <a:p>
             <a:fld id="{5BCAD085-E8A6-8845-BD4E-CB4CCA059FC4}" type="datetimeFigureOut">
               <a:rPr lang="en-US" smtClean="0"/>
-              <a:t>1/27/13</a:t>
+              <a:t>6/17/2026</a:t>
             </a:fld>
             <a:endParaRPr lang="en-US"/>
           </a:p>
@@ -2572,6 +2599,9 @@
   <p:clrMapOvr>
     <a:masterClrMapping/>
   </p:clrMapOvr>
+  <p:transition spd="slow">
+    <p:wipe/>
+  </p:transition>
 </p:sldLayout>
 </file>
 
@@ -2623,10 +2653,9 @@
           <a:lstStyle/>
           <a:p>
             <a:r>
-              <a:rPr lang="en-US" smtClean="0"/>
+              <a:rPr lang="en-US"/>
               <a:t>Click to edit Master title style</a:t>
             </a:r>
-            <a:endParaRPr lang="en-US"/>
           </a:p>
         </p:txBody>
       </p:sp>
@@ -2657,38 +2686,37 @@
           <a:p>
             <a:pPr lvl="0"/>
             <a:r>
-              <a:rPr lang="en-US" smtClean="0"/>
+              <a:rPr lang="en-US"/>
               <a:t>Click to edit Master text styles</a:t>
             </a:r>
           </a:p>
           <a:p>
             <a:pPr lvl="1"/>
             <a:r>
-              <a:rPr lang="en-US" smtClean="0"/>
+              <a:rPr lang="en-US"/>
               <a:t>Second level</a:t>
             </a:r>
           </a:p>
           <a:p>
             <a:pPr lvl="2"/>
             <a:r>
-              <a:rPr lang="en-US" smtClean="0"/>
+              <a:rPr lang="en-US"/>
               <a:t>Third level</a:t>
             </a:r>
           </a:p>
           <a:p>
             <a:pPr lvl="3"/>
             <a:r>
-              <a:rPr lang="en-US" smtClean="0"/>
+              <a:rPr lang="en-US"/>
               <a:t>Fourth level</a:t>
             </a:r>
           </a:p>
           <a:p>
             <a:pPr lvl="4"/>
             <a:r>
-              <a:rPr lang="en-US" smtClean="0"/>
+              <a:rPr lang="en-US"/>
               <a:t>Fifth level</a:t>
             </a:r>
-            <a:endParaRPr lang="en-US"/>
           </a:p>
         </p:txBody>
       </p:sp>
@@ -2727,7 +2755,7 @@
           <a:p>
             <a:fld id="{5BCAD085-E8A6-8845-BD4E-CB4CCA059FC4}" type="datetimeFigureOut">
               <a:rPr lang="en-US" smtClean="0"/>
-              <a:t>1/27/13</a:t>
+              <a:t>6/17/2026</a:t>
             </a:fld>
             <a:endParaRPr lang="en-US"/>
           </a:p>
@@ -2832,6 +2860,9 @@
     <p:sldLayoutId id="2147483658" r:id="rId10"/>
     <p:sldLayoutId id="2147483659" r:id="rId11"/>
   </p:sldLayoutIdLst>
+  <p:transition spd="slow">
+    <p:wipe/>
+  </p:transition>
   <p:txStyles>
     <p:titleStyle>
       <a:lvl1pPr algn="ctr" defTabSz="457200" rtl="0" eaLnBrk="1" latinLnBrk="0" hangingPunct="1">
@@ -3086,7 +3117,7 @@
 </file>
 
 <file path=ppt/slides/slide1.xml><?xml version="1.0" encoding="utf-8"?>
-<p:sld xmlns:a="http://schemas.openxmlformats.org/drawingml/2006/main" xmlns:p="http://schemas.openxmlformats.org/presentationml/2006/main" xmlns:r="http://schemas.openxmlformats.org/officeDocument/2006/relationships">
+<p:sld xmlns:a="http://schemas.openxmlformats.org/drawingml/2006/main" xmlns:r="http://schemas.openxmlformats.org/officeDocument/2006/relationships" xmlns:p="http://schemas.openxmlformats.org/presentationml/2006/main">
   <p:cSld>
     <p:bg>
       <p:bgPr>
@@ -3102,7 +3133,2543 @@
         <p:cNvGrpSpPr/>
         <p:nvPr/>
       </p:nvGrpSpPr>
-      <p:grpSpPr/>
+      <p:grpSpPr>
+        <a:xfrm>
+          <a:off x="0" y="0"/>
+          <a:ext cx="0" cy="0"/>
+          <a:chOff x="0" y="0"/>
+          <a:chExt cx="0" cy="0"/>
+        </a:xfrm>
+      </p:grpSpPr>
+      <p:sp>
+        <p:nvSpPr>
+          <p:cNvPr id="2" name="Rectangle 1"/>
+          <p:cNvSpPr/>
+          <p:nvPr/>
+        </p:nvSpPr>
+        <p:spPr>
+          <a:xfrm>
+            <a:off x="1371600" y="1654885"/>
+            <a:ext cx="9445752" cy="3474720"/>
+          </a:xfrm>
+          <a:prstGeom prst="rect">
+            <a:avLst/>
+          </a:prstGeom>
+          <a:solidFill>
+            <a:srgbClr val="161D30"/>
+          </a:solidFill>
+          <a:ln w="19050">
+            <a:solidFill>
+              <a:srgbClr val="28324B"/>
+            </a:solidFill>
+          </a:ln>
+        </p:spPr>
+        <p:style>
+          <a:lnRef idx="1">
+            <a:schemeClr val="accent1"/>
+          </a:lnRef>
+          <a:fillRef idx="3">
+            <a:schemeClr val="accent1"/>
+          </a:fillRef>
+          <a:effectRef idx="2">
+            <a:schemeClr val="accent1"/>
+          </a:effectRef>
+          <a:fontRef idx="minor">
+            <a:schemeClr val="lt1"/>
+          </a:fontRef>
+        </p:style>
+        <p:txBody>
+          <a:bodyPr rtlCol="0" anchor="ctr"/>
+          <a:lstStyle/>
+          <a:p>
+            <a:pPr algn="ctr"/>
+            <a:endParaRPr/>
+          </a:p>
+        </p:txBody>
+      </p:sp>
+      <p:sp>
+        <p:nvSpPr>
+          <p:cNvPr id="3" name="TextBox 2"/>
+          <p:cNvSpPr txBox="1"/>
+          <p:nvPr/>
+        </p:nvSpPr>
+        <p:spPr>
+          <a:xfrm>
+            <a:off x="1828800" y="1920240"/>
+            <a:ext cx="8531352" cy="2011680"/>
+          </a:xfrm>
+          <a:prstGeom prst="rect">
+            <a:avLst/>
+          </a:prstGeom>
+          <a:noFill/>
+        </p:spPr>
+        <p:txBody>
+          <a:bodyPr wrap="square">
+            <a:spAutoFit/>
+          </a:bodyPr>
+          <a:lstStyle/>
+          <a:p>
+            <a:pPr>
+              <a:spcAft>
+                <a:spcPts val="800"/>
+              </a:spcAft>
+              <a:defRPr sz="1200" b="1">
+                <a:solidFill>
+                  <a:srgbClr val="C084FC"/>
+                </a:solidFill>
+                <a:latin typeface="Inter"/>
+              </a:defRPr>
+            </a:pPr>
+            <a:r>
+              <a:rPr dirty="0"/>
+              <a:t>100% PRIVATE &amp; OFFLINE INTELLIGENCE</a:t>
+            </a:r>
+          </a:p>
+          <a:p>
+            <a:pPr>
+              <a:spcAft>
+                <a:spcPts val="400"/>
+              </a:spcAft>
+              <a:defRPr sz="5400" b="1">
+                <a:solidFill>
+                  <a:srgbClr val="38BDF8"/>
+                </a:solidFill>
+                <a:latin typeface="Inter"/>
+              </a:defRPr>
+            </a:pPr>
+            <a:r>
+              <a:rPr dirty="0"/>
+              <a:t>LAFO</a:t>
+            </a:r>
+          </a:p>
+          <a:p>
+            <a:pPr>
+              <a:spcAft>
+                <a:spcPts val="1400"/>
+              </a:spcAft>
+              <a:defRPr sz="2400" b="1">
+                <a:solidFill>
+                  <a:srgbClr val="F1F5F9"/>
+                </a:solidFill>
+                <a:latin typeface="Inter"/>
+              </a:defRPr>
+            </a:pPr>
+            <a:r>
+              <a:rPr dirty="0"/>
+              <a:t>Local Agentic File Organizer</a:t>
+            </a:r>
+          </a:p>
+          <a:p>
+            <a:pPr>
+              <a:spcAft>
+                <a:spcPts val="0"/>
+              </a:spcAft>
+              <a:defRPr sz="1400" b="0">
+                <a:solidFill>
+                  <a:srgbClr val="94A3B8"/>
+                </a:solidFill>
+                <a:latin typeface="Inter"/>
+              </a:defRPr>
+            </a:pPr>
+            <a:r>
+              <a:rPr dirty="0"/>
+              <a:t>Automatically monitors, extracts content, classifies, renames, and moves files using local LLMs &amp; Vector </a:t>
+            </a:r>
+            <a:r>
+              <a:rPr dirty="0" err="1"/>
+              <a:t>DBs.</a:t>
+            </a:r>
+            <a:endParaRPr dirty="0"/>
+          </a:p>
+        </p:txBody>
+      </p:sp>
+      <p:sp>
+        <p:nvSpPr>
+          <p:cNvPr id="4" name="TextBox 3"/>
+          <p:cNvSpPr txBox="1"/>
+          <p:nvPr/>
+        </p:nvSpPr>
+        <p:spPr>
+          <a:xfrm>
+            <a:off x="1828800" y="4297680"/>
+            <a:ext cx="8531352" cy="548640"/>
+          </a:xfrm>
+          <a:prstGeom prst="rect">
+            <a:avLst/>
+          </a:prstGeom>
+          <a:noFill/>
+        </p:spPr>
+        <p:txBody>
+          <a:bodyPr wrap="none">
+            <a:spAutoFit/>
+          </a:bodyPr>
+          <a:lstStyle/>
+          <a:p>
+            <a:pPr>
+              <a:spcAft>
+                <a:spcPts val="0"/>
+              </a:spcAft>
+              <a:defRPr sz="1200" b="0">
+                <a:solidFill>
+                  <a:srgbClr val="22C55E"/>
+                </a:solidFill>
+                <a:latin typeface="Consolas"/>
+              </a:defRPr>
+            </a:pPr>
+            <a:r>
+              <a:t>🛡️ Zero Cloud Leakage    |    🧠 FAISS Pre-Filtering    |    🤖 local Llama 3 (Ollama)</a:t>
+            </a:r>
+          </a:p>
+        </p:txBody>
+      </p:sp>
+    </p:spTree>
+  </p:cSld>
+  <p:clrMapOvr>
+    <a:masterClrMapping/>
+  </p:clrMapOvr>
+  <p:transition spd="slow">
+    <p:wipe/>
+  </p:transition>
+</p:sld>
+</file>
+
+<file path=ppt/slides/slide2.xml><?xml version="1.0" encoding="utf-8"?>
+<p:sld xmlns:a="http://schemas.openxmlformats.org/drawingml/2006/main" xmlns:r="http://schemas.openxmlformats.org/officeDocument/2006/relationships" xmlns:p="http://schemas.openxmlformats.org/presentationml/2006/main">
+  <p:cSld>
+    <p:bg>
+      <p:bgPr>
+        <a:solidFill>
+          <a:srgbClr val="0B0F19"/>
+        </a:solidFill>
+        <a:effectLst/>
+      </p:bgPr>
+    </p:bg>
+    <p:spTree>
+      <p:nvGrpSpPr>
+        <p:cNvPr id="1" name=""/>
+        <p:cNvGrpSpPr/>
+        <p:nvPr/>
+      </p:nvGrpSpPr>
+      <p:grpSpPr>
+        <a:xfrm>
+          <a:off x="0" y="0"/>
+          <a:ext cx="0" cy="0"/>
+          <a:chOff x="0" y="0"/>
+          <a:chExt cx="0" cy="0"/>
+        </a:xfrm>
+      </p:grpSpPr>
+      <p:sp>
+        <p:nvSpPr>
+          <p:cNvPr id="2" name="TextBox 1"/>
+          <p:cNvSpPr txBox="1"/>
+          <p:nvPr/>
+        </p:nvSpPr>
+        <p:spPr>
+          <a:xfrm>
+            <a:off x="685800" y="457200"/>
+            <a:ext cx="10817352" cy="731520"/>
+          </a:xfrm>
+          <a:prstGeom prst="rect">
+            <a:avLst/>
+          </a:prstGeom>
+          <a:noFill/>
+        </p:spPr>
+        <p:txBody>
+          <a:bodyPr wrap="square" lIns="0" tIns="0" rIns="0" bIns="0">
+            <a:spAutoFit/>
+          </a:bodyPr>
+          <a:lstStyle/>
+          <a:p>
+            <a:pPr>
+              <a:defRPr sz="3200" b="1">
+                <a:solidFill>
+                  <a:srgbClr val="38BDF8"/>
+                </a:solidFill>
+                <a:latin typeface="Inter"/>
+              </a:defRPr>
+            </a:pPr>
+            <a:r>
+              <a:t>The Core Ingestion Problem</a:t>
+            </a:r>
+          </a:p>
+        </p:txBody>
+      </p:sp>
+      <p:sp>
+        <p:nvSpPr>
+          <p:cNvPr id="3" name="TextBox 2"/>
+          <p:cNvSpPr txBox="1"/>
+          <p:nvPr/>
+        </p:nvSpPr>
+        <p:spPr>
+          <a:xfrm>
+            <a:off x="685800" y="1463040"/>
+            <a:ext cx="6400800" cy="4572000"/>
+          </a:xfrm>
+          <a:prstGeom prst="rect">
+            <a:avLst/>
+          </a:prstGeom>
+          <a:noFill/>
+        </p:spPr>
+        <p:txBody>
+          <a:bodyPr wrap="square">
+            <a:spAutoFit/>
+          </a:bodyPr>
+          <a:lstStyle/>
+          <a:p>
+            <a:pPr>
+              <a:spcAft>
+                <a:spcPts val="1600"/>
+              </a:spcAft>
+              <a:defRPr sz="1800" b="0">
+                <a:solidFill>
+                  <a:srgbClr val="F1F5F9"/>
+                </a:solidFill>
+                <a:latin typeface="Inter"/>
+              </a:defRPr>
+            </a:pPr>
+            <a:r>
+              <a:t>Manual file organization is a critical, time-consuming drag:</a:t>
+            </a:r>
+          </a:p>
+          <a:p>
+            <a:pPr>
+              <a:spcAft>
+                <a:spcPts val="400"/>
+              </a:spcAft>
+              <a:defRPr sz="1600" b="1">
+                <a:solidFill>
+                  <a:srgbClr val="C084FC"/>
+                </a:solidFill>
+                <a:latin typeface="Inter"/>
+              </a:defRPr>
+            </a:pPr>
+            <a:r>
+              <a:t>• Unstructured Downloads Folder</a:t>
+            </a:r>
+          </a:p>
+          <a:p>
+            <a:pPr>
+              <a:spcAft>
+                <a:spcPts val="1400"/>
+              </a:spcAft>
+              <a:defRPr sz="1400" b="0">
+                <a:solidFill>
+                  <a:srgbClr val="94A3B8"/>
+                </a:solidFill>
+                <a:latin typeface="Inter"/>
+              </a:defRPr>
+            </a:pPr>
+            <a:r>
+              <a:t>  Browser downloads clog up your directories with invoices, tax forms, reports, and bills mixed together.</a:t>
+            </a:r>
+          </a:p>
+          <a:p>
+            <a:pPr>
+              <a:spcAft>
+                <a:spcPts val="400"/>
+              </a:spcAft>
+              <a:defRPr sz="1600" b="1">
+                <a:solidFill>
+                  <a:srgbClr val="C084FC"/>
+                </a:solidFill>
+                <a:latin typeface="Inter"/>
+              </a:defRPr>
+            </a:pPr>
+            <a:r>
+              <a:t>• Cloud Data Exposure / Privacy Leakage</a:t>
+            </a:r>
+          </a:p>
+          <a:p>
+            <a:pPr>
+              <a:spcAft>
+                <a:spcPts val="1400"/>
+              </a:spcAft>
+              <a:defRPr sz="1400" b="0">
+                <a:solidFill>
+                  <a:srgbClr val="94A3B8"/>
+                </a:solidFill>
+                <a:latin typeface="Inter"/>
+              </a:defRPr>
+            </a:pPr>
+            <a:r>
+              <a:t>  Uploading sensitive papers (pension letters, bank statements, asset documents) to online AI platforms leaks personal metadata.</a:t>
+            </a:r>
+          </a:p>
+          <a:p>
+            <a:pPr>
+              <a:spcAft>
+                <a:spcPts val="400"/>
+              </a:spcAft>
+              <a:defRPr sz="1600" b="1">
+                <a:solidFill>
+                  <a:srgbClr val="C084FC"/>
+                </a:solidFill>
+                <a:latin typeface="Inter"/>
+              </a:defRPr>
+            </a:pPr>
+            <a:r>
+              <a:t>• Model Timeout on Heavy Taxonomies</a:t>
+            </a:r>
+          </a:p>
+          <a:p>
+            <a:pPr>
+              <a:spcAft>
+                <a:spcPts val="0"/>
+              </a:spcAft>
+              <a:defRPr sz="1400" b="0">
+                <a:solidFill>
+                  <a:srgbClr val="94A3B8"/>
+                </a:solidFill>
+                <a:latin typeface="Inter"/>
+              </a:defRPr>
+            </a:pPr>
+            <a:r>
+              <a:t>  Passing large folder structures (e.g. 302 categories) directly to a local CPU-based LLM causes severe latency and prompt timeout crashes.</a:t>
+            </a:r>
+          </a:p>
+        </p:txBody>
+      </p:sp>
+      <p:sp>
+        <p:nvSpPr>
+          <p:cNvPr id="4" name="Rounded Rectangle 3"/>
+          <p:cNvSpPr/>
+          <p:nvPr/>
+        </p:nvSpPr>
+        <p:spPr>
+          <a:xfrm>
+            <a:off x="7589520" y="1645920"/>
+            <a:ext cx="3913632" cy="4114800"/>
+          </a:xfrm>
+          <a:prstGeom prst="roundRect">
+            <a:avLst/>
+          </a:prstGeom>
+          <a:solidFill>
+            <a:srgbClr val="161D30"/>
+          </a:solidFill>
+          <a:ln>
+            <a:solidFill>
+              <a:srgbClr val="28324B"/>
+            </a:solidFill>
+          </a:ln>
+        </p:spPr>
+        <p:style>
+          <a:lnRef idx="1">
+            <a:schemeClr val="accent1"/>
+          </a:lnRef>
+          <a:fillRef idx="3">
+            <a:schemeClr val="accent1"/>
+          </a:fillRef>
+          <a:effectRef idx="2">
+            <a:schemeClr val="accent1"/>
+          </a:effectRef>
+          <a:fontRef idx="minor">
+            <a:schemeClr val="lt1"/>
+          </a:fontRef>
+        </p:style>
+        <p:txBody>
+          <a:bodyPr rtlCol="0" anchor="ctr"/>
+          <a:lstStyle/>
+          <a:p>
+            <a:pPr algn="ctr"/>
+            <a:endParaRPr/>
+          </a:p>
+        </p:txBody>
+      </p:sp>
+      <p:sp>
+        <p:nvSpPr>
+          <p:cNvPr id="5" name="TextBox 4"/>
+          <p:cNvSpPr txBox="1"/>
+          <p:nvPr/>
+        </p:nvSpPr>
+        <p:spPr>
+          <a:xfrm>
+            <a:off x="7772400" y="2011680"/>
+            <a:ext cx="3547872" cy="3474720"/>
+          </a:xfrm>
+          <a:prstGeom prst="rect">
+            <a:avLst/>
+          </a:prstGeom>
+          <a:noFill/>
+        </p:spPr>
+        <p:txBody>
+          <a:bodyPr wrap="square">
+            <a:spAutoFit/>
+          </a:bodyPr>
+          <a:lstStyle/>
+          <a:p>
+            <a:pPr>
+              <a:spcAft>
+                <a:spcPts val="1400"/>
+              </a:spcAft>
+              <a:defRPr sz="1200" b="1">
+                <a:solidFill>
+                  <a:srgbClr val="C084FC"/>
+                </a:solidFill>
+                <a:latin typeface="Inter"/>
+              </a:defRPr>
+            </a:pPr>
+            <a:r>
+              <a:t>CRITICAL METRIC</a:t>
+            </a:r>
+          </a:p>
+          <a:p>
+            <a:pPr>
+              <a:spcAft>
+                <a:spcPts val="400"/>
+              </a:spcAft>
+              <a:defRPr sz="4800" b="1">
+                <a:solidFill>
+                  <a:srgbClr val="38BDF8"/>
+                </a:solidFill>
+                <a:latin typeface="Inter"/>
+              </a:defRPr>
+            </a:pPr>
+            <a:r>
+              <a:t>302</a:t>
+            </a:r>
+          </a:p>
+          <a:p>
+            <a:pPr>
+              <a:spcAft>
+                <a:spcPts val="1400"/>
+              </a:spcAft>
+              <a:defRPr sz="1600" b="1">
+                <a:solidFill>
+                  <a:srgbClr val="F1F5F9"/>
+                </a:solidFill>
+                <a:latin typeface="Inter"/>
+              </a:defRPr>
+            </a:pPr>
+            <a:r>
+              <a:t>Destination Folders</a:t>
+            </a:r>
+          </a:p>
+          <a:p>
+            <a:pPr>
+              <a:spcAft>
+                <a:spcPts val="0"/>
+              </a:spcAft>
+              <a:defRPr sz="1300" b="0">
+                <a:solidFill>
+                  <a:srgbClr val="94A3B8"/>
+                </a:solidFill>
+                <a:latin typeface="Inter"/>
+              </a:defRPr>
+            </a:pPr>
+            <a:r>
+              <a:t>Passing this massive list of folders directly to Ollama creates a context of &gt;20,000 characters, leading to massive memory bloat and CPU processing timeouts.</a:t>
+            </a:r>
+          </a:p>
+        </p:txBody>
+      </p:sp>
+    </p:spTree>
+  </p:cSld>
+  <p:clrMapOvr>
+    <a:masterClrMapping/>
+  </p:clrMapOvr>
+  <p:transition spd="slow">
+    <p:wipe/>
+  </p:transition>
+</p:sld>
+</file>
+
+<file path=ppt/slides/slide3.xml><?xml version="1.0" encoding="utf-8"?>
+<p:sld xmlns:a="http://schemas.openxmlformats.org/drawingml/2006/main" xmlns:r="http://schemas.openxmlformats.org/officeDocument/2006/relationships" xmlns:p="http://schemas.openxmlformats.org/presentationml/2006/main">
+  <p:cSld>
+    <p:bg>
+      <p:bgPr>
+        <a:solidFill>
+          <a:srgbClr val="0B0F19"/>
+        </a:solidFill>
+        <a:effectLst/>
+      </p:bgPr>
+    </p:bg>
+    <p:spTree>
+      <p:nvGrpSpPr>
+        <p:cNvPr id="1" name=""/>
+        <p:cNvGrpSpPr/>
+        <p:nvPr/>
+      </p:nvGrpSpPr>
+      <p:grpSpPr>
+        <a:xfrm>
+          <a:off x="0" y="0"/>
+          <a:ext cx="0" cy="0"/>
+          <a:chOff x="0" y="0"/>
+          <a:chExt cx="0" cy="0"/>
+        </a:xfrm>
+      </p:grpSpPr>
+      <p:sp>
+        <p:nvSpPr>
+          <p:cNvPr id="2" name="TextBox 1"/>
+          <p:cNvSpPr txBox="1"/>
+          <p:nvPr/>
+        </p:nvSpPr>
+        <p:spPr>
+          <a:xfrm>
+            <a:off x="685800" y="457200"/>
+            <a:ext cx="10817352" cy="731520"/>
+          </a:xfrm>
+          <a:prstGeom prst="rect">
+            <a:avLst/>
+          </a:prstGeom>
+          <a:noFill/>
+        </p:spPr>
+        <p:txBody>
+          <a:bodyPr wrap="square" lIns="0" tIns="0" rIns="0" bIns="0">
+            <a:spAutoFit/>
+          </a:bodyPr>
+          <a:lstStyle/>
+          <a:p>
+            <a:pPr>
+              <a:defRPr sz="3200" b="1">
+                <a:solidFill>
+                  <a:srgbClr val="38BDF8"/>
+                </a:solidFill>
+                <a:latin typeface="Inter"/>
+              </a:defRPr>
+            </a:pPr>
+            <a:r>
+              <a:t>The Privacy-First Solution</a:t>
+            </a:r>
+          </a:p>
+        </p:txBody>
+      </p:sp>
+      <p:sp>
+        <p:nvSpPr>
+          <p:cNvPr id="3" name="TextBox 2"/>
+          <p:cNvSpPr txBox="1"/>
+          <p:nvPr/>
+        </p:nvSpPr>
+        <p:spPr>
+          <a:xfrm>
+            <a:off x="685800" y="1463040"/>
+            <a:ext cx="6400800" cy="4572000"/>
+          </a:xfrm>
+          <a:prstGeom prst="rect">
+            <a:avLst/>
+          </a:prstGeom>
+          <a:noFill/>
+        </p:spPr>
+        <p:txBody>
+          <a:bodyPr wrap="square">
+            <a:spAutoFit/>
+          </a:bodyPr>
+          <a:lstStyle/>
+          <a:p>
+            <a:pPr>
+              <a:spcAft>
+                <a:spcPts val="1600"/>
+              </a:spcAft>
+              <a:defRPr sz="1800" b="0">
+                <a:solidFill>
+                  <a:srgbClr val="F1F5F9"/>
+                </a:solidFill>
+                <a:latin typeface="Inter"/>
+              </a:defRPr>
+            </a:pPr>
+            <a:r>
+              <a:t>LAFO operates as a secure, local background daemon:</a:t>
+            </a:r>
+          </a:p>
+          <a:p>
+            <a:pPr>
+              <a:spcAft>
+                <a:spcPts val="400"/>
+              </a:spcAft>
+              <a:defRPr sz="1600" b="1">
+                <a:solidFill>
+                  <a:srgbClr val="22C55E"/>
+                </a:solidFill>
+                <a:latin typeface="Inter"/>
+              </a:defRPr>
+            </a:pPr>
+            <a:r>
+              <a:t>✓ 100% Offline Processing</a:t>
+            </a:r>
+          </a:p>
+          <a:p>
+            <a:pPr>
+              <a:spcAft>
+                <a:spcPts val="1400"/>
+              </a:spcAft>
+              <a:defRPr sz="1400" b="0">
+                <a:solidFill>
+                  <a:srgbClr val="94A3B8"/>
+                </a:solidFill>
+                <a:latin typeface="Inter"/>
+              </a:defRPr>
+            </a:pPr>
+            <a:r>
+              <a:t>  All operations—from PDF extraction and vector searches to LLM routing—happen offline on localhost. No external telemetry.</a:t>
+            </a:r>
+          </a:p>
+          <a:p>
+            <a:pPr>
+              <a:spcAft>
+                <a:spcPts val="400"/>
+              </a:spcAft>
+              <a:defRPr sz="1600" b="1">
+                <a:solidFill>
+                  <a:srgbClr val="22C55E"/>
+                </a:solidFill>
+                <a:latin typeface="Inter"/>
+              </a:defRPr>
+            </a:pPr>
+            <a:r>
+              <a:t>✓ Autonomous Watchdog Observer</a:t>
+            </a:r>
+          </a:p>
+          <a:p>
+            <a:pPr>
+              <a:spcAft>
+                <a:spcPts val="1400"/>
+              </a:spcAft>
+              <a:defRPr sz="1400" b="0">
+                <a:solidFill>
+                  <a:srgbClr val="94A3B8"/>
+                </a:solidFill>
+                <a:latin typeface="Inter"/>
+              </a:defRPr>
+            </a:pPr>
+            <a:r>
+              <a:t>  Runs quietly in the system tray, scanning for file creations or browser rename events, queuing tasks to concurrent worker threads.</a:t>
+            </a:r>
+          </a:p>
+          <a:p>
+            <a:pPr>
+              <a:spcAft>
+                <a:spcPts val="400"/>
+              </a:spcAft>
+              <a:defRPr sz="1600" b="1">
+                <a:solidFill>
+                  <a:srgbClr val="22C55E"/>
+                </a:solidFill>
+                <a:latin typeface="Inter"/>
+              </a:defRPr>
+            </a:pPr>
+            <a:r>
+              <a:t>✓ Smart Operations &amp; Deduplication</a:t>
+            </a:r>
+          </a:p>
+          <a:p>
+            <a:pPr>
+              <a:spcAft>
+                <a:spcPts val="0"/>
+              </a:spcAft>
+              <a:defRPr sz="1400" b="0">
+                <a:solidFill>
+                  <a:srgbClr val="94A3B8"/>
+                </a:solidFill>
+                <a:latin typeface="Inter"/>
+              </a:defRPr>
+            </a:pPr>
+            <a:r>
+              <a:t>  Auto-renames files semantically based on text content and extracted dates. Pre-checks SHA-256 hashes to filter out redundant file moves.</a:t>
+            </a:r>
+          </a:p>
+        </p:txBody>
+      </p:sp>
+      <p:sp>
+        <p:nvSpPr>
+          <p:cNvPr id="4" name="Rounded Rectangle 3"/>
+          <p:cNvSpPr/>
+          <p:nvPr/>
+        </p:nvSpPr>
+        <p:spPr>
+          <a:xfrm>
+            <a:off x="7589520" y="1645920"/>
+            <a:ext cx="3913632" cy="4114800"/>
+          </a:xfrm>
+          <a:prstGeom prst="roundRect">
+            <a:avLst/>
+          </a:prstGeom>
+          <a:solidFill>
+            <a:srgbClr val="161D30"/>
+          </a:solidFill>
+          <a:ln>
+            <a:solidFill>
+              <a:srgbClr val="28324B"/>
+            </a:solidFill>
+          </a:ln>
+        </p:spPr>
+        <p:style>
+          <a:lnRef idx="1">
+            <a:schemeClr val="accent1"/>
+          </a:lnRef>
+          <a:fillRef idx="3">
+            <a:schemeClr val="accent1"/>
+          </a:fillRef>
+          <a:effectRef idx="2">
+            <a:schemeClr val="accent1"/>
+          </a:effectRef>
+          <a:fontRef idx="minor">
+            <a:schemeClr val="lt1"/>
+          </a:fontRef>
+        </p:style>
+        <p:txBody>
+          <a:bodyPr rtlCol="0" anchor="ctr"/>
+          <a:lstStyle/>
+          <a:p>
+            <a:pPr algn="ctr"/>
+            <a:endParaRPr/>
+          </a:p>
+        </p:txBody>
+      </p:sp>
+      <p:sp>
+        <p:nvSpPr>
+          <p:cNvPr id="5" name="TextBox 4"/>
+          <p:cNvSpPr txBox="1"/>
+          <p:nvPr/>
+        </p:nvSpPr>
+        <p:spPr>
+          <a:xfrm>
+            <a:off x="7772400" y="2011680"/>
+            <a:ext cx="3547872" cy="3474720"/>
+          </a:xfrm>
+          <a:prstGeom prst="rect">
+            <a:avLst/>
+          </a:prstGeom>
+          <a:noFill/>
+        </p:spPr>
+        <p:txBody>
+          <a:bodyPr wrap="square">
+            <a:spAutoFit/>
+          </a:bodyPr>
+          <a:lstStyle/>
+          <a:p>
+            <a:pPr>
+              <a:spcAft>
+                <a:spcPts val="1400"/>
+              </a:spcAft>
+              <a:defRPr sz="1200" b="1">
+                <a:solidFill>
+                  <a:srgbClr val="22C55E"/>
+                </a:solidFill>
+                <a:latin typeface="Inter"/>
+              </a:defRPr>
+            </a:pPr>
+            <a:r>
+              <a:t>SECURITY AUDIT</a:t>
+            </a:r>
+          </a:p>
+          <a:p>
+            <a:pPr>
+              <a:spcAft>
+                <a:spcPts val="400"/>
+              </a:spcAft>
+              <a:defRPr sz="4200" b="1">
+                <a:solidFill>
+                  <a:srgbClr val="22C55E"/>
+                </a:solidFill>
+                <a:latin typeface="Inter"/>
+              </a:defRPr>
+            </a:pPr>
+            <a:r>
+              <a:t>SECURE</a:t>
+            </a:r>
+          </a:p>
+          <a:p>
+            <a:pPr>
+              <a:spcAft>
+                <a:spcPts val="1400"/>
+              </a:spcAft>
+              <a:defRPr sz="1600" b="1">
+                <a:solidFill>
+                  <a:srgbClr val="F1F5F9"/>
+                </a:solidFill>
+                <a:latin typeface="Inter"/>
+              </a:defRPr>
+            </a:pPr>
+            <a:r>
+              <a:t>Local Sandboxed Runs</a:t>
+            </a:r>
+          </a:p>
+          <a:p>
+            <a:pPr>
+              <a:spcAft>
+                <a:spcPts val="0"/>
+              </a:spcAft>
+              <a:defRPr sz="1200" b="0">
+                <a:solidFill>
+                  <a:srgbClr val="94A3B8"/>
+                </a:solidFill>
+                <a:latin typeface="Consolas"/>
+              </a:defRPr>
+            </a:pPr>
+            <a:r>
+              <a:t>• Path names remain local</a:t>
+            </a:r>
+            <a:br/>
+            <a:r>
+              <a:t>• Document strings never uploaded</a:t>
+            </a:r>
+            <a:br/>
+            <a:r>
+              <a:t>• Logs cached locally in user folder</a:t>
+            </a:r>
+            <a:br/>
+            <a:r>
+              <a:t>• Full compliance with offline environments</a:t>
+            </a:r>
+          </a:p>
+        </p:txBody>
+      </p:sp>
+    </p:spTree>
+  </p:cSld>
+  <p:clrMapOvr>
+    <a:masterClrMapping/>
+  </p:clrMapOvr>
+  <p:transition spd="slow">
+    <p:wipe/>
+  </p:transition>
+</p:sld>
+</file>
+
+<file path=ppt/slides/slide4.xml><?xml version="1.0" encoding="utf-8"?>
+<p:sld xmlns:a="http://schemas.openxmlformats.org/drawingml/2006/main" xmlns:r="http://schemas.openxmlformats.org/officeDocument/2006/relationships" xmlns:p="http://schemas.openxmlformats.org/presentationml/2006/main">
+  <p:cSld>
+    <p:bg>
+      <p:bgPr>
+        <a:solidFill>
+          <a:srgbClr val="0B0F19"/>
+        </a:solidFill>
+        <a:effectLst/>
+      </p:bgPr>
+    </p:bg>
+    <p:spTree>
+      <p:nvGrpSpPr>
+        <p:cNvPr id="1" name=""/>
+        <p:cNvGrpSpPr/>
+        <p:nvPr/>
+      </p:nvGrpSpPr>
+      <p:grpSpPr>
+        <a:xfrm>
+          <a:off x="0" y="0"/>
+          <a:ext cx="0" cy="0"/>
+          <a:chOff x="0" y="0"/>
+          <a:chExt cx="0" cy="0"/>
+        </a:xfrm>
+      </p:grpSpPr>
+      <p:sp>
+        <p:nvSpPr>
+          <p:cNvPr id="2" name="TextBox 1"/>
+          <p:cNvSpPr txBox="1"/>
+          <p:nvPr/>
+        </p:nvSpPr>
+        <p:spPr>
+          <a:xfrm>
+            <a:off x="685800" y="457200"/>
+            <a:ext cx="10817352" cy="731520"/>
+          </a:xfrm>
+          <a:prstGeom prst="rect">
+            <a:avLst/>
+          </a:prstGeom>
+          <a:noFill/>
+        </p:spPr>
+        <p:txBody>
+          <a:bodyPr wrap="square" lIns="0" tIns="0" rIns="0" bIns="0">
+            <a:spAutoFit/>
+          </a:bodyPr>
+          <a:lstStyle/>
+          <a:p>
+            <a:pPr>
+              <a:defRPr sz="3200" b="1">
+                <a:solidFill>
+                  <a:srgbClr val="38BDF8"/>
+                </a:solidFill>
+                <a:latin typeface="Inter"/>
+              </a:defRPr>
+            </a:pPr>
+            <a:r>
+              <a:t>Data Flow Architecture</a:t>
+            </a:r>
+          </a:p>
+        </p:txBody>
+      </p:sp>
+      <p:sp>
+        <p:nvSpPr>
+          <p:cNvPr id="3" name="TextBox 2"/>
+          <p:cNvSpPr txBox="1"/>
+          <p:nvPr/>
+        </p:nvSpPr>
+        <p:spPr>
+          <a:xfrm>
+            <a:off x="685800" y="1463040"/>
+            <a:ext cx="5486400" cy="4572000"/>
+          </a:xfrm>
+          <a:prstGeom prst="rect">
+            <a:avLst/>
+          </a:prstGeom>
+          <a:noFill/>
+        </p:spPr>
+        <p:txBody>
+          <a:bodyPr wrap="square">
+            <a:spAutoFit/>
+          </a:bodyPr>
+          <a:lstStyle/>
+          <a:p>
+            <a:pPr>
+              <a:spcAft>
+                <a:spcPts val="1600"/>
+              </a:spcAft>
+              <a:defRPr sz="1800" b="0">
+                <a:solidFill>
+                  <a:srgbClr val="F1F5F9"/>
+                </a:solidFill>
+                <a:latin typeface="Inter"/>
+              </a:defRPr>
+            </a:pPr>
+            <a:r>
+              <a:t>LAFO manages ingestion through 5 sequential phases:</a:t>
+            </a:r>
+          </a:p>
+          <a:p>
+            <a:pPr>
+              <a:spcAft>
+                <a:spcPts val="200"/>
+              </a:spcAft>
+              <a:defRPr sz="1500" b="1">
+                <a:solidFill>
+                  <a:srgbClr val="38BDF8"/>
+                </a:solidFill>
+                <a:latin typeface="Inter"/>
+              </a:defRPr>
+            </a:pPr>
+            <a:r>
+              <a:t>1. File Stability Verification:</a:t>
+            </a:r>
+          </a:p>
+          <a:p>
+            <a:pPr>
+              <a:spcAft>
+                <a:spcPts val="800"/>
+              </a:spcAft>
+              <a:defRPr sz="1300" b="0">
+                <a:solidFill>
+                  <a:srgbClr val="94A3B8"/>
+                </a:solidFill>
+                <a:latin typeface="Inter"/>
+              </a:defRPr>
+            </a:pPr>
+            <a:r>
+              <a:t>   Watchdog catches files and waits for write operations to lock/complete.</a:t>
+            </a:r>
+          </a:p>
+          <a:p>
+            <a:pPr>
+              <a:spcAft>
+                <a:spcPts val="200"/>
+              </a:spcAft>
+              <a:defRPr sz="1500" b="1">
+                <a:solidFill>
+                  <a:srgbClr val="38BDF8"/>
+                </a:solidFill>
+                <a:latin typeface="Inter"/>
+              </a:defRPr>
+            </a:pPr>
+            <a:r>
+              <a:t>2. FAISS Vector Search Pre-Filtering:</a:t>
+            </a:r>
+          </a:p>
+          <a:p>
+            <a:pPr>
+              <a:spcAft>
+                <a:spcPts val="800"/>
+              </a:spcAft>
+              <a:defRPr sz="1300" b="0">
+                <a:solidFill>
+                  <a:srgbClr val="94A3B8"/>
+                </a:solidFill>
+                <a:latin typeface="Inter"/>
+              </a:defRPr>
+            </a:pPr>
+            <a:r>
+              <a:t>   Matches file text against indexed directory names &amp; file exemplars.</a:t>
+            </a:r>
+          </a:p>
+          <a:p>
+            <a:pPr>
+              <a:spcAft>
+                <a:spcPts val="200"/>
+              </a:spcAft>
+              <a:defRPr sz="1500" b="1">
+                <a:solidFill>
+                  <a:srgbClr val="38BDF8"/>
+                </a:solidFill>
+                <a:latin typeface="Inter"/>
+              </a:defRPr>
+            </a:pPr>
+            <a:r>
+              <a:t>3. Candidate Narrowing:</a:t>
+            </a:r>
+          </a:p>
+          <a:p>
+            <a:pPr>
+              <a:spcAft>
+                <a:spcPts val="800"/>
+              </a:spcAft>
+              <a:defRPr sz="1300" b="0">
+                <a:solidFill>
+                  <a:srgbClr val="94A3B8"/>
+                </a:solidFill>
+                <a:latin typeface="Inter"/>
+              </a:defRPr>
+            </a:pPr>
+            <a:r>
+              <a:t>   Reduces the 302 categories down to the top 3-5 candidates for the LLM.</a:t>
+            </a:r>
+          </a:p>
+          <a:p>
+            <a:pPr>
+              <a:spcAft>
+                <a:spcPts val="200"/>
+              </a:spcAft>
+              <a:defRPr sz="1500" b="1">
+                <a:solidFill>
+                  <a:srgbClr val="38BDF8"/>
+                </a:solidFill>
+                <a:latin typeface="Inter"/>
+              </a:defRPr>
+            </a:pPr>
+            <a:r>
+              <a:t>4. Native JSON Model &amp; Retry Loops:</a:t>
+            </a:r>
+          </a:p>
+          <a:p>
+            <a:pPr>
+              <a:spcAft>
+                <a:spcPts val="800"/>
+              </a:spcAft>
+              <a:defRPr sz="1300" b="0">
+                <a:solidFill>
+                  <a:srgbClr val="94A3B8"/>
+                </a:solidFill>
+                <a:latin typeface="Inter"/>
+              </a:defRPr>
+            </a:pPr>
+            <a:r>
+              <a:t>   Ollama processes candidate subset in JSON format; retries up to 3 times on parsing error.</a:t>
+            </a:r>
+          </a:p>
+          <a:p>
+            <a:pPr>
+              <a:spcAft>
+                <a:spcPts val="200"/>
+              </a:spcAft>
+              <a:defRPr sz="1500" b="1">
+                <a:solidFill>
+                  <a:srgbClr val="38BDF8"/>
+                </a:solidFill>
+                <a:latin typeface="Inter"/>
+              </a:defRPr>
+            </a:pPr>
+            <a:r>
+              <a:t>5. Double-Check and Atomic Move:</a:t>
+            </a:r>
+          </a:p>
+          <a:p>
+            <a:pPr>
+              <a:spcAft>
+                <a:spcPts val="0"/>
+              </a:spcAft>
+              <a:defRPr sz="1300" b="0">
+                <a:solidFill>
+                  <a:srgbClr val="94A3B8"/>
+                </a:solidFill>
+                <a:latin typeface="Inter"/>
+              </a:defRPr>
+            </a:pPr>
+            <a:r>
+              <a:t>   Verifies duplicate hash, renames semantically, and moves atomically.</a:t>
+            </a:r>
+          </a:p>
+        </p:txBody>
+      </p:sp>
+      <p:sp>
+        <p:nvSpPr>
+          <p:cNvPr id="4" name="TextBox 3"/>
+          <p:cNvSpPr txBox="1"/>
+          <p:nvPr/>
+        </p:nvSpPr>
+        <p:spPr>
+          <a:xfrm>
+            <a:off x="6583680" y="1371600"/>
+            <a:ext cx="4919472" cy="4754880"/>
+          </a:xfrm>
+          <a:prstGeom prst="rect">
+            <a:avLst/>
+          </a:prstGeom>
+          <a:noFill/>
+        </p:spPr>
+        <p:txBody>
+          <a:bodyPr wrap="square">
+            <a:spAutoFit/>
+          </a:bodyPr>
+          <a:lstStyle/>
+          <a:p>
+            <a:pPr>
+              <a:spcAft>
+                <a:spcPts val="1400"/>
+              </a:spcAft>
+              <a:defRPr sz="1200" b="1">
+                <a:solidFill>
+                  <a:srgbClr val="C084FC"/>
+                </a:solidFill>
+                <a:latin typeface="Consolas"/>
+              </a:defRPr>
+            </a:pPr>
+            <a:r>
+              <a:t>PIPELINES VISUALIZER</a:t>
+            </a:r>
+          </a:p>
+          <a:p>
+            <a:pPr algn="l">
+              <a:spcAft>
+                <a:spcPts val="400"/>
+              </a:spcAft>
+              <a:defRPr sz="1400" b="1">
+                <a:solidFill>
+                  <a:srgbClr val="38BDF8"/>
+                </a:solidFill>
+                <a:latin typeface="Consolas"/>
+              </a:defRPr>
+            </a:pPr>
+            <a:r>
+              <a:t>   [ WATCHDOG STABILITY CHECK ]</a:t>
+            </a:r>
+          </a:p>
+          <a:p>
+            <a:pPr algn="l">
+              <a:spcAft>
+                <a:spcPts val="400"/>
+              </a:spcAft>
+              <a:defRPr sz="1200" b="0">
+                <a:solidFill>
+                  <a:srgbClr val="94A3B8"/>
+                </a:solidFill>
+                <a:latin typeface="Consolas"/>
+              </a:defRPr>
+            </a:pPr>
+            <a:r>
+              <a:t>            ↓</a:t>
+            </a:r>
+          </a:p>
+          <a:p>
+            <a:pPr algn="l">
+              <a:spcAft>
+                <a:spcPts val="400"/>
+              </a:spcAft>
+              <a:defRPr sz="1400" b="1">
+                <a:solidFill>
+                  <a:srgbClr val="38BDF8"/>
+                </a:solidFill>
+                <a:latin typeface="Consolas"/>
+              </a:defRPr>
+            </a:pPr>
+            <a:r>
+              <a:t>   [ FAISS TAXONOMY PRE-FILTER ]</a:t>
+            </a:r>
+          </a:p>
+          <a:p>
+            <a:pPr algn="l">
+              <a:spcAft>
+                <a:spcPts val="400"/>
+              </a:spcAft>
+              <a:defRPr sz="1200" b="0">
+                <a:solidFill>
+                  <a:srgbClr val="94A3B8"/>
+                </a:solidFill>
+                <a:latin typeface="Consolas"/>
+              </a:defRPr>
+            </a:pPr>
+            <a:r>
+              <a:t>            ↓</a:t>
+            </a:r>
+          </a:p>
+          <a:p>
+            <a:pPr algn="l">
+              <a:spcAft>
+                <a:spcPts val="400"/>
+              </a:spcAft>
+              <a:defRPr sz="1400" b="1">
+                <a:solidFill>
+                  <a:srgbClr val="38BDF8"/>
+                </a:solidFill>
+                <a:latin typeface="Consolas"/>
+              </a:defRPr>
+            </a:pPr>
+            <a:r>
+              <a:t>   [ LLM ROUTING (NATIVE JSON MODE) ]</a:t>
+            </a:r>
+          </a:p>
+          <a:p>
+            <a:pPr algn="l">
+              <a:spcAft>
+                <a:spcPts val="400"/>
+              </a:spcAft>
+              <a:defRPr sz="1200" b="0">
+                <a:solidFill>
+                  <a:srgbClr val="94A3B8"/>
+                </a:solidFill>
+                <a:latin typeface="Consolas"/>
+              </a:defRPr>
+            </a:pPr>
+            <a:r>
+              <a:t>            ↓</a:t>
+            </a:r>
+          </a:p>
+          <a:p>
+            <a:pPr>
+              <a:spcAft>
+                <a:spcPts val="0"/>
+              </a:spcAft>
+              <a:defRPr sz="1400" b="1">
+                <a:solidFill>
+                  <a:srgbClr val="C084FC"/>
+                </a:solidFill>
+                <a:latin typeface="Consolas"/>
+              </a:defRPr>
+            </a:pPr>
+            <a:r>
+              <a:t>   [ ATOMIC MOVE &amp; LOGGING ]</a:t>
+            </a:r>
+          </a:p>
+        </p:txBody>
+      </p:sp>
+    </p:spTree>
+  </p:cSld>
+  <p:clrMapOvr>
+    <a:masterClrMapping/>
+  </p:clrMapOvr>
+  <p:transition spd="slow">
+    <p:wipe/>
+  </p:transition>
+</p:sld>
+</file>
+
+<file path=ppt/slides/slide5.xml><?xml version="1.0" encoding="utf-8"?>
+<p:sld xmlns:a="http://schemas.openxmlformats.org/drawingml/2006/main" xmlns:r="http://schemas.openxmlformats.org/officeDocument/2006/relationships" xmlns:p="http://schemas.openxmlformats.org/presentationml/2006/main">
+  <p:cSld>
+    <p:bg>
+      <p:bgPr>
+        <a:solidFill>
+          <a:srgbClr val="0B0F19"/>
+        </a:solidFill>
+        <a:effectLst/>
+      </p:bgPr>
+    </p:bg>
+    <p:spTree>
+      <p:nvGrpSpPr>
+        <p:cNvPr id="1" name=""/>
+        <p:cNvGrpSpPr/>
+        <p:nvPr/>
+      </p:nvGrpSpPr>
+      <p:grpSpPr>
+        <a:xfrm>
+          <a:off x="0" y="0"/>
+          <a:ext cx="0" cy="0"/>
+          <a:chOff x="0" y="0"/>
+          <a:chExt cx="0" cy="0"/>
+        </a:xfrm>
+      </p:grpSpPr>
+      <p:sp>
+        <p:nvSpPr>
+          <p:cNvPr id="2" name="TextBox 1"/>
+          <p:cNvSpPr txBox="1"/>
+          <p:nvPr/>
+        </p:nvSpPr>
+        <p:spPr>
+          <a:xfrm>
+            <a:off x="685800" y="457200"/>
+            <a:ext cx="10817352" cy="731520"/>
+          </a:xfrm>
+          <a:prstGeom prst="rect">
+            <a:avLst/>
+          </a:prstGeom>
+          <a:noFill/>
+        </p:spPr>
+        <p:txBody>
+          <a:bodyPr wrap="square" lIns="0" tIns="0" rIns="0" bIns="0">
+            <a:spAutoFit/>
+          </a:bodyPr>
+          <a:lstStyle/>
+          <a:p>
+            <a:pPr>
+              <a:defRPr sz="3200" b="1">
+                <a:solidFill>
+                  <a:srgbClr val="38BDF8"/>
+                </a:solidFill>
+                <a:latin typeface="Inter"/>
+              </a:defRPr>
+            </a:pPr>
+            <a:r>
+              <a:t>New in Version 1.3</a:t>
+            </a:r>
+          </a:p>
+        </p:txBody>
+      </p:sp>
+      <p:sp>
+        <p:nvSpPr>
+          <p:cNvPr id="3" name="Rounded Rectangle 2"/>
+          <p:cNvSpPr/>
+          <p:nvPr/>
+        </p:nvSpPr>
+        <p:spPr>
+          <a:xfrm>
+            <a:off x="685800" y="1463040"/>
+            <a:ext cx="5120640" cy="2103120"/>
+          </a:xfrm>
+          <a:prstGeom prst="roundRect">
+            <a:avLst/>
+          </a:prstGeom>
+          <a:solidFill>
+            <a:srgbClr val="161D30"/>
+          </a:solidFill>
+          <a:ln>
+            <a:solidFill>
+              <a:srgbClr val="28324B"/>
+            </a:solidFill>
+          </a:ln>
+        </p:spPr>
+        <p:style>
+          <a:lnRef idx="1">
+            <a:schemeClr val="accent1"/>
+          </a:lnRef>
+          <a:fillRef idx="3">
+            <a:schemeClr val="accent1"/>
+          </a:fillRef>
+          <a:effectRef idx="2">
+            <a:schemeClr val="accent1"/>
+          </a:effectRef>
+          <a:fontRef idx="minor">
+            <a:schemeClr val="lt1"/>
+          </a:fontRef>
+        </p:style>
+        <p:txBody>
+          <a:bodyPr rtlCol="0" anchor="ctr"/>
+          <a:lstStyle/>
+          <a:p>
+            <a:pPr algn="ctr"/>
+            <a:endParaRPr/>
+          </a:p>
+        </p:txBody>
+      </p:sp>
+      <p:sp>
+        <p:nvSpPr>
+          <p:cNvPr id="4" name="TextBox 3"/>
+          <p:cNvSpPr txBox="1"/>
+          <p:nvPr/>
+        </p:nvSpPr>
+        <p:spPr>
+          <a:xfrm>
+            <a:off x="868680" y="1645920"/>
+            <a:ext cx="4754880" cy="1737360"/>
+          </a:xfrm>
+          <a:prstGeom prst="rect">
+            <a:avLst/>
+          </a:prstGeom>
+          <a:noFill/>
+        </p:spPr>
+        <p:txBody>
+          <a:bodyPr wrap="square">
+            <a:spAutoFit/>
+          </a:bodyPr>
+          <a:lstStyle/>
+          <a:p>
+            <a:pPr>
+              <a:spcAft>
+                <a:spcPts val="600"/>
+              </a:spcAft>
+              <a:defRPr sz="1600" b="1">
+                <a:solidFill>
+                  <a:srgbClr val="38BDF8"/>
+                </a:solidFill>
+                <a:latin typeface="Inter"/>
+              </a:defRPr>
+            </a:pPr>
+            <a:r>
+              <a:t>1. Single-Instance Execution Lock</a:t>
+            </a:r>
+          </a:p>
+          <a:p>
+            <a:pPr>
+              <a:spcAft>
+                <a:spcPts val="0"/>
+              </a:spcAft>
+              <a:defRPr sz="1300" b="0">
+                <a:solidFill>
+                  <a:srgbClr val="94A3B8"/>
+                </a:solidFill>
+                <a:latin typeface="Inter"/>
+              </a:defRPr>
+            </a:pPr>
+            <a:r>
+              <a:t>Uses Windows msvcrt.locking on lafo.lock to prevent multiple orchestrator instances from running simultaneously, blocking duplicate file-move operations.</a:t>
+            </a:r>
+          </a:p>
+        </p:txBody>
+      </p:sp>
+      <p:sp>
+        <p:nvSpPr>
+          <p:cNvPr id="5" name="Rounded Rectangle 4"/>
+          <p:cNvSpPr/>
+          <p:nvPr/>
+        </p:nvSpPr>
+        <p:spPr>
+          <a:xfrm>
+            <a:off x="6382512" y="1463040"/>
+            <a:ext cx="5120640" cy="2103120"/>
+          </a:xfrm>
+          <a:prstGeom prst="roundRect">
+            <a:avLst/>
+          </a:prstGeom>
+          <a:solidFill>
+            <a:srgbClr val="161D30"/>
+          </a:solidFill>
+          <a:ln>
+            <a:solidFill>
+              <a:srgbClr val="28324B"/>
+            </a:solidFill>
+          </a:ln>
+        </p:spPr>
+        <p:style>
+          <a:lnRef idx="1">
+            <a:schemeClr val="accent1"/>
+          </a:lnRef>
+          <a:fillRef idx="3">
+            <a:schemeClr val="accent1"/>
+          </a:fillRef>
+          <a:effectRef idx="2">
+            <a:schemeClr val="accent1"/>
+          </a:effectRef>
+          <a:fontRef idx="minor">
+            <a:schemeClr val="lt1"/>
+          </a:fontRef>
+        </p:style>
+        <p:txBody>
+          <a:bodyPr rtlCol="0" anchor="ctr"/>
+          <a:lstStyle/>
+          <a:p>
+            <a:pPr algn="ctr"/>
+            <a:endParaRPr/>
+          </a:p>
+        </p:txBody>
+      </p:sp>
+      <p:sp>
+        <p:nvSpPr>
+          <p:cNvPr id="6" name="TextBox 5"/>
+          <p:cNvSpPr txBox="1"/>
+          <p:nvPr/>
+        </p:nvSpPr>
+        <p:spPr>
+          <a:xfrm>
+            <a:off x="6565392" y="1645920"/>
+            <a:ext cx="4754880" cy="1737360"/>
+          </a:xfrm>
+          <a:prstGeom prst="rect">
+            <a:avLst/>
+          </a:prstGeom>
+          <a:noFill/>
+        </p:spPr>
+        <p:txBody>
+          <a:bodyPr wrap="square">
+            <a:spAutoFit/>
+          </a:bodyPr>
+          <a:lstStyle/>
+          <a:p>
+            <a:pPr>
+              <a:spcAft>
+                <a:spcPts val="600"/>
+              </a:spcAft>
+              <a:defRPr sz="1600" b="1">
+                <a:solidFill>
+                  <a:srgbClr val="38BDF8"/>
+                </a:solidFill>
+                <a:latin typeface="Inter"/>
+              </a:defRPr>
+            </a:pPr>
+            <a:r>
+              <a:t>2. Vector Candidate Pre-Filtering</a:t>
+            </a:r>
+          </a:p>
+          <a:p>
+            <a:pPr>
+              <a:spcAft>
+                <a:spcPts val="0"/>
+              </a:spcAft>
+              <a:defRPr sz="1300" b="0">
+                <a:solidFill>
+                  <a:srgbClr val="94A3B8"/>
+                </a:solidFill>
+                <a:latin typeface="Inter"/>
+              </a:defRPr>
+            </a:pPr>
+            <a:r>
+              <a:t>Narrow down categories from 302 to top 3-5 candidates via local similarity search before prompting the LLM, reducing CPU context by 20x and stopping timeouts.</a:t>
+            </a:r>
+          </a:p>
+        </p:txBody>
+      </p:sp>
+      <p:sp>
+        <p:nvSpPr>
+          <p:cNvPr id="7" name="Rounded Rectangle 6"/>
+          <p:cNvSpPr/>
+          <p:nvPr/>
+        </p:nvSpPr>
+        <p:spPr>
+          <a:xfrm>
+            <a:off x="685800" y="3931920"/>
+            <a:ext cx="5120640" cy="2103120"/>
+          </a:xfrm>
+          <a:prstGeom prst="roundRect">
+            <a:avLst/>
+          </a:prstGeom>
+          <a:solidFill>
+            <a:srgbClr val="161D30"/>
+          </a:solidFill>
+          <a:ln>
+            <a:solidFill>
+              <a:srgbClr val="28324B"/>
+            </a:solidFill>
+          </a:ln>
+        </p:spPr>
+        <p:style>
+          <a:lnRef idx="1">
+            <a:schemeClr val="accent1"/>
+          </a:lnRef>
+          <a:fillRef idx="3">
+            <a:schemeClr val="accent1"/>
+          </a:fillRef>
+          <a:effectRef idx="2">
+            <a:schemeClr val="accent1"/>
+          </a:effectRef>
+          <a:fontRef idx="minor">
+            <a:schemeClr val="lt1"/>
+          </a:fontRef>
+        </p:style>
+        <p:txBody>
+          <a:bodyPr rtlCol="0" anchor="ctr"/>
+          <a:lstStyle/>
+          <a:p>
+            <a:pPr algn="ctr"/>
+            <a:endParaRPr/>
+          </a:p>
+        </p:txBody>
+      </p:sp>
+      <p:sp>
+        <p:nvSpPr>
+          <p:cNvPr id="8" name="TextBox 7"/>
+          <p:cNvSpPr txBox="1"/>
+          <p:nvPr/>
+        </p:nvSpPr>
+        <p:spPr>
+          <a:xfrm>
+            <a:off x="868680" y="4114800"/>
+            <a:ext cx="4754880" cy="1737360"/>
+          </a:xfrm>
+          <a:prstGeom prst="rect">
+            <a:avLst/>
+          </a:prstGeom>
+          <a:noFill/>
+        </p:spPr>
+        <p:txBody>
+          <a:bodyPr wrap="square">
+            <a:spAutoFit/>
+          </a:bodyPr>
+          <a:lstStyle/>
+          <a:p>
+            <a:pPr>
+              <a:spcAft>
+                <a:spcPts val="600"/>
+              </a:spcAft>
+              <a:defRPr sz="1600" b="1">
+                <a:solidFill>
+                  <a:srgbClr val="38BDF8"/>
+                </a:solidFill>
+                <a:latin typeface="Inter"/>
+              </a:defRPr>
+            </a:pPr>
+            <a:r>
+              <a:t>3. Exemplar-Based File Indexing</a:t>
+            </a:r>
+          </a:p>
+          <a:p>
+            <a:pPr>
+              <a:spcAft>
+                <a:spcPts val="0"/>
+              </a:spcAft>
+              <a:defRPr sz="1300" b="0">
+                <a:solidFill>
+                  <a:srgbClr val="94A3B8"/>
+                </a:solidFill>
+                <a:latin typeface="Inter"/>
+              </a:defRPr>
+            </a:pPr>
+            <a:r>
+              <a:t>Indexes the first 15 files in target folders as semantic 'exemplars' inside the FAISS database. Learns your established naming and sorting patterns dynamically.</a:t>
+            </a:r>
+          </a:p>
+        </p:txBody>
+      </p:sp>
+      <p:sp>
+        <p:nvSpPr>
+          <p:cNvPr id="9" name="Rounded Rectangle 8"/>
+          <p:cNvSpPr/>
+          <p:nvPr/>
+        </p:nvSpPr>
+        <p:spPr>
+          <a:xfrm>
+            <a:off x="6382512" y="3931920"/>
+            <a:ext cx="5120640" cy="2103120"/>
+          </a:xfrm>
+          <a:prstGeom prst="roundRect">
+            <a:avLst/>
+          </a:prstGeom>
+          <a:solidFill>
+            <a:srgbClr val="161D30"/>
+          </a:solidFill>
+          <a:ln>
+            <a:solidFill>
+              <a:srgbClr val="28324B"/>
+            </a:solidFill>
+          </a:ln>
+        </p:spPr>
+        <p:style>
+          <a:lnRef idx="1">
+            <a:schemeClr val="accent1"/>
+          </a:lnRef>
+          <a:fillRef idx="3">
+            <a:schemeClr val="accent1"/>
+          </a:fillRef>
+          <a:effectRef idx="2">
+            <a:schemeClr val="accent1"/>
+          </a:effectRef>
+          <a:fontRef idx="minor">
+            <a:schemeClr val="lt1"/>
+          </a:fontRef>
+        </p:style>
+        <p:txBody>
+          <a:bodyPr rtlCol="0" anchor="ctr"/>
+          <a:lstStyle/>
+          <a:p>
+            <a:pPr algn="ctr"/>
+            <a:endParaRPr/>
+          </a:p>
+        </p:txBody>
+      </p:sp>
+      <p:sp>
+        <p:nvSpPr>
+          <p:cNvPr id="10" name="TextBox 9"/>
+          <p:cNvSpPr txBox="1"/>
+          <p:nvPr/>
+        </p:nvSpPr>
+        <p:spPr>
+          <a:xfrm>
+            <a:off x="6565392" y="4114800"/>
+            <a:ext cx="4754880" cy="1737360"/>
+          </a:xfrm>
+          <a:prstGeom prst="rect">
+            <a:avLst/>
+          </a:prstGeom>
+          <a:noFill/>
+        </p:spPr>
+        <p:txBody>
+          <a:bodyPr wrap="square">
+            <a:spAutoFit/>
+          </a:bodyPr>
+          <a:lstStyle/>
+          <a:p>
+            <a:pPr>
+              <a:spcAft>
+                <a:spcPts val="600"/>
+              </a:spcAft>
+              <a:defRPr sz="1600" b="1">
+                <a:solidFill>
+                  <a:srgbClr val="38BDF8"/>
+                </a:solidFill>
+                <a:latin typeface="Inter"/>
+              </a:defRPr>
+            </a:pPr>
+            <a:r>
+              <a:t>4. Failure Quarantining</a:t>
+            </a:r>
+          </a:p>
+          <a:p>
+            <a:pPr>
+              <a:spcAft>
+                <a:spcPts val="0"/>
+              </a:spcAft>
+              <a:defRPr sz="1300" b="0">
+                <a:solidFill>
+                  <a:srgbClr val="94A3B8"/>
+                </a:solidFill>
+                <a:latin typeface="Inter"/>
+              </a:defRPr>
+            </a:pPr>
+            <a:r>
+              <a:t>Documents failing classification after 3 retry loops are quarantined and routed to Unsorted_Review folder instead of clogging the monitored Downloads directory.</a:t>
+            </a:r>
+          </a:p>
+        </p:txBody>
+      </p:sp>
+    </p:spTree>
+  </p:cSld>
+  <p:clrMapOvr>
+    <a:masterClrMapping/>
+  </p:clrMapOvr>
+  <p:transition spd="slow">
+    <p:wipe/>
+  </p:transition>
+</p:sld>
+</file>
+
+<file path=ppt/slides/slide6.xml><?xml version="1.0" encoding="utf-8"?>
+<p:sld xmlns:a="http://schemas.openxmlformats.org/drawingml/2006/main" xmlns:r="http://schemas.openxmlformats.org/officeDocument/2006/relationships" xmlns:p="http://schemas.openxmlformats.org/presentationml/2006/main">
+  <p:cSld>
+    <p:bg>
+      <p:bgPr>
+        <a:solidFill>
+          <a:srgbClr val="0B0F19"/>
+        </a:solidFill>
+        <a:effectLst/>
+      </p:bgPr>
+    </p:bg>
+    <p:spTree>
+      <p:nvGrpSpPr>
+        <p:cNvPr id="1" name=""/>
+        <p:cNvGrpSpPr/>
+        <p:nvPr/>
+      </p:nvGrpSpPr>
+      <p:grpSpPr>
+        <a:xfrm>
+          <a:off x="0" y="0"/>
+          <a:ext cx="0" cy="0"/>
+          <a:chOff x="0" y="0"/>
+          <a:chExt cx="0" cy="0"/>
+        </a:xfrm>
+      </p:grpSpPr>
+      <p:sp>
+        <p:nvSpPr>
+          <p:cNvPr id="2" name="TextBox 1"/>
+          <p:cNvSpPr txBox="1"/>
+          <p:nvPr/>
+        </p:nvSpPr>
+        <p:spPr>
+          <a:xfrm>
+            <a:off x="685800" y="457200"/>
+            <a:ext cx="10817352" cy="731520"/>
+          </a:xfrm>
+          <a:prstGeom prst="rect">
+            <a:avLst/>
+          </a:prstGeom>
+          <a:noFill/>
+        </p:spPr>
+        <p:txBody>
+          <a:bodyPr wrap="square" lIns="0" tIns="0" rIns="0" bIns="0">
+            <a:spAutoFit/>
+          </a:bodyPr>
+          <a:lstStyle/>
+          <a:p>
+            <a:pPr>
+              <a:defRPr sz="3200" b="1">
+                <a:solidFill>
+                  <a:srgbClr val="38BDF8"/>
+                </a:solidFill>
+                <a:latin typeface="Inter"/>
+              </a:defRPr>
+            </a:pPr>
+            <a:r>
+              <a:t>Concurrency &amp; GPU Optimizations</a:t>
+            </a:r>
+          </a:p>
+        </p:txBody>
+      </p:sp>
+      <p:sp>
+        <p:nvSpPr>
+          <p:cNvPr id="3" name="TextBox 2"/>
+          <p:cNvSpPr txBox="1"/>
+          <p:nvPr/>
+        </p:nvSpPr>
+        <p:spPr>
+          <a:xfrm>
+            <a:off x="685800" y="1463040"/>
+            <a:ext cx="5486400" cy="4572000"/>
+          </a:xfrm>
+          <a:prstGeom prst="rect">
+            <a:avLst/>
+          </a:prstGeom>
+          <a:noFill/>
+        </p:spPr>
+        <p:txBody>
+          <a:bodyPr wrap="square">
+            <a:spAutoFit/>
+          </a:bodyPr>
+          <a:lstStyle/>
+          <a:p>
+            <a:pPr>
+              <a:spcAft>
+                <a:spcPts val="1600"/>
+              </a:spcAft>
+              <a:defRPr sz="1800" b="0">
+                <a:solidFill>
+                  <a:srgbClr val="F1F5F9"/>
+                </a:solidFill>
+                <a:latin typeface="Inter"/>
+              </a:defRPr>
+            </a:pPr>
+            <a:r>
+              <a:t>LAFO leverages multithreading for maximum responsiveness:</a:t>
+            </a:r>
+          </a:p>
+          <a:p>
+            <a:pPr>
+              <a:spcAft>
+                <a:spcPts val="400"/>
+              </a:spcAft>
+              <a:defRPr sz="1600" b="1">
+                <a:solidFill>
+                  <a:srgbClr val="C084FC"/>
+                </a:solidFill>
+                <a:latin typeface="Inter"/>
+              </a:defRPr>
+            </a:pPr>
+            <a:r>
+              <a:t>• ThreadPoolExecutor Workers</a:t>
+            </a:r>
+          </a:p>
+          <a:p>
+            <a:pPr>
+              <a:spcAft>
+                <a:spcPts val="1400"/>
+              </a:spcAft>
+              <a:defRPr sz="1400" b="0">
+                <a:solidFill>
+                  <a:srgbClr val="94A3B8"/>
+                </a:solidFill>
+                <a:latin typeface="Inter"/>
+              </a:defRPr>
+            </a:pPr>
+            <a:r>
+              <a:t>  Dispatches file tasks to a background thread pool (default 4 workers) so browser download transactions are never blocked.</a:t>
+            </a:r>
+          </a:p>
+          <a:p>
+            <a:pPr>
+              <a:spcAft>
+                <a:spcPts val="400"/>
+              </a:spcAft>
+              <a:defRPr sz="1600" b="1">
+                <a:solidFill>
+                  <a:srgbClr val="C084FC"/>
+                </a:solidFill>
+                <a:latin typeface="Inter"/>
+              </a:defRPr>
+            </a:pPr>
+            <a:r>
+              <a:t>• Concurrency Locks</a:t>
+            </a:r>
+          </a:p>
+          <a:p>
+            <a:pPr>
+              <a:spcAft>
+                <a:spcPts val="1400"/>
+              </a:spcAft>
+              <a:defRPr sz="1400" b="0">
+                <a:solidFill>
+                  <a:srgbClr val="94A3B8"/>
+                </a:solidFill>
+                <a:latin typeface="Inter"/>
+              </a:defRPr>
+            </a:pPr>
+            <a:r>
+              <a:t>  Protects stats updates, log entries, and filesystem transactions using mutex locks (`stats_lock`, `file_op_lock`) to prevent race condition write errors.</a:t>
+            </a:r>
+          </a:p>
+          <a:p>
+            <a:pPr>
+              <a:spcAft>
+                <a:spcPts val="400"/>
+              </a:spcAft>
+              <a:defRPr sz="1600" b="1">
+                <a:solidFill>
+                  <a:srgbClr val="C084FC"/>
+                </a:solidFill>
+                <a:latin typeface="Inter"/>
+              </a:defRPr>
+            </a:pPr>
+            <a:r>
+              <a:t>• CUDA Hardware Acceleration</a:t>
+            </a:r>
+          </a:p>
+          <a:p>
+            <a:pPr>
+              <a:spcAft>
+                <a:spcPts val="0"/>
+              </a:spcAft>
+              <a:defRPr sz="1400" b="0">
+                <a:solidFill>
+                  <a:srgbClr val="94A3B8"/>
+                </a:solidFill>
+                <a:latin typeface="Inter"/>
+              </a:defRPr>
+            </a:pPr>
+            <a:r>
+              <a:t>  Automatically checks for PyTorch GPU/CUDA drivers. Runs embedding calculations locally on hardware when available, falling back safely to CPU.</a:t>
+            </a:r>
+          </a:p>
+        </p:txBody>
+      </p:sp>
+      <p:sp>
+        <p:nvSpPr>
+          <p:cNvPr id="4" name="Rounded Rectangle 3"/>
+          <p:cNvSpPr/>
+          <p:nvPr/>
+        </p:nvSpPr>
+        <p:spPr>
+          <a:xfrm>
+            <a:off x="6583680" y="1645920"/>
+            <a:ext cx="4919472" cy="4114800"/>
+          </a:xfrm>
+          <a:prstGeom prst="roundRect">
+            <a:avLst/>
+          </a:prstGeom>
+          <a:solidFill>
+            <a:srgbClr val="161D30"/>
+          </a:solidFill>
+          <a:ln>
+            <a:solidFill>
+              <a:srgbClr val="28324B"/>
+            </a:solidFill>
+          </a:ln>
+        </p:spPr>
+        <p:style>
+          <a:lnRef idx="1">
+            <a:schemeClr val="accent1"/>
+          </a:lnRef>
+          <a:fillRef idx="3">
+            <a:schemeClr val="accent1"/>
+          </a:fillRef>
+          <a:effectRef idx="2">
+            <a:schemeClr val="accent1"/>
+          </a:effectRef>
+          <a:fontRef idx="minor">
+            <a:schemeClr val="lt1"/>
+          </a:fontRef>
+        </p:style>
+        <p:txBody>
+          <a:bodyPr rtlCol="0" anchor="ctr"/>
+          <a:lstStyle/>
+          <a:p>
+            <a:pPr algn="ctr"/>
+            <a:endParaRPr/>
+          </a:p>
+        </p:txBody>
+      </p:sp>
+      <p:sp>
+        <p:nvSpPr>
+          <p:cNvPr id="5" name="TextBox 4"/>
+          <p:cNvSpPr txBox="1"/>
+          <p:nvPr/>
+        </p:nvSpPr>
+        <p:spPr>
+          <a:xfrm>
+            <a:off x="6720840" y="1828800"/>
+            <a:ext cx="4645152" cy="3749039"/>
+          </a:xfrm>
+          <a:prstGeom prst="rect">
+            <a:avLst/>
+          </a:prstGeom>
+          <a:noFill/>
+        </p:spPr>
+        <p:txBody>
+          <a:bodyPr wrap="square">
+            <a:spAutoFit/>
+          </a:bodyPr>
+          <a:lstStyle/>
+          <a:p>
+            <a:pPr>
+              <a:spcAft>
+                <a:spcPts val="1000"/>
+              </a:spcAft>
+              <a:defRPr sz="1200" b="1">
+                <a:solidFill>
+                  <a:srgbClr val="38BDF8"/>
+                </a:solidFill>
+                <a:latin typeface="Consolas"/>
+              </a:defRPr>
+            </a:pPr>
+            <a:r>
+              <a:t>THREAD SAFE OPERATIONS (main.py)</a:t>
+            </a:r>
+          </a:p>
+          <a:p>
+            <a:pPr>
+              <a:spcAft>
+                <a:spcPts val="1600"/>
+              </a:spcAft>
+              <a:defRPr sz="1150" b="0">
+                <a:solidFill>
+                  <a:srgbClr val="F1F5F9"/>
+                </a:solidFill>
+                <a:latin typeface="Consolas"/>
+              </a:defRPr>
+            </a:pPr>
+            <a:r>
+              <a:t>def process_file(self, file_path):</a:t>
+            </a:r>
+            <a:br/>
+            <a:r>
+              <a:t>    # ... extract text</a:t>
+            </a:r>
+            <a:br/>
+            <a:r>
+              <a:t>    # ... pre-filter candidates</a:t>
+            </a:r>
+            <a:br/>
+            <a:r>
+              <a:t>    # ... classify</a:t>
+            </a:r>
+            <a:br/>
+            <a:r>
+              <a:t>    with self.file_op_lock:</a:t>
+            </a:r>
+            <a:br/>
+            <a:r>
+              <a:t>        # Verify duplicate SHA-256 hash</a:t>
+            </a:r>
+            <a:br/>
+            <a:r>
+              <a:t>        # Move file atomically</a:t>
+            </a:r>
+            <a:br/>
+            <a:r>
+              <a:t>        # Log SUCCESS to execution.log</a:t>
+            </a:r>
+          </a:p>
+          <a:p>
+            <a:pPr>
+              <a:spcAft>
+                <a:spcPts val="1000"/>
+              </a:spcAft>
+              <a:defRPr sz="1200" b="1">
+                <a:solidFill>
+                  <a:srgbClr val="C084FC"/>
+                </a:solidFill>
+                <a:latin typeface="Consolas"/>
+              </a:defRPr>
+            </a:pPr>
+            <a:r>
+              <a:t>CUDA DEVICE DETECT (vector_store.py)</a:t>
+            </a:r>
+          </a:p>
+          <a:p>
+            <a:pPr>
+              <a:spcAft>
+                <a:spcPts val="0"/>
+              </a:spcAft>
+              <a:defRPr sz="1150" b="0">
+                <a:solidFill>
+                  <a:srgbClr val="F1F5F9"/>
+                </a:solidFill>
+                <a:latin typeface="Consolas"/>
+              </a:defRPr>
+            </a:pPr>
+            <a:r>
+              <a:t>device = 'cuda' if torch.cuda.is_available() \</a:t>
+            </a:r>
+            <a:br/>
+            <a:r>
+              <a:t>         else 'cpu'</a:t>
+            </a:r>
+            <a:br/>
+            <a:r>
+              <a:t>self.embeddings = HuggingFaceEmbeddings(</a:t>
+            </a:r>
+            <a:br/>
+            <a:r>
+              <a:t>    model_name=EMBEDDING_MODEL,</a:t>
+            </a:r>
+            <a:br/>
+            <a:r>
+              <a:t>    model_kwargs={'device': device}</a:t>
+            </a:r>
+            <a:br/>
+            <a:r>
+              <a:t>)</a:t>
+            </a:r>
+          </a:p>
+        </p:txBody>
+      </p:sp>
+    </p:spTree>
+  </p:cSld>
+  <p:clrMapOvr>
+    <a:masterClrMapping/>
+  </p:clrMapOvr>
+  <p:transition spd="slow">
+    <p:wipe/>
+  </p:transition>
+</p:sld>
+</file>
+
+<file path=ppt/slides/slide7.xml><?xml version="1.0" encoding="utf-8"?>
+<p:sld xmlns:a="http://schemas.openxmlformats.org/drawingml/2006/main" xmlns:r="http://schemas.openxmlformats.org/officeDocument/2006/relationships" xmlns:p="http://schemas.openxmlformats.org/presentationml/2006/main">
+  <p:cSld>
+    <p:bg>
+      <p:bgPr>
+        <a:solidFill>
+          <a:srgbClr val="0B0F19"/>
+        </a:solidFill>
+        <a:effectLst/>
+      </p:bgPr>
+    </p:bg>
+    <p:spTree>
+      <p:nvGrpSpPr>
+        <p:cNvPr id="1" name=""/>
+        <p:cNvGrpSpPr/>
+        <p:nvPr/>
+      </p:nvGrpSpPr>
+      <p:grpSpPr>
+        <a:xfrm>
+          <a:off x="0" y="0"/>
+          <a:ext cx="0" cy="0"/>
+          <a:chOff x="0" y="0"/>
+          <a:chExt cx="0" cy="0"/>
+        </a:xfrm>
+      </p:grpSpPr>
+      <p:sp>
+        <p:nvSpPr>
+          <p:cNvPr id="2" name="TextBox 1"/>
+          <p:cNvSpPr txBox="1"/>
+          <p:nvPr/>
+        </p:nvSpPr>
+        <p:spPr>
+          <a:xfrm>
+            <a:off x="685800" y="457200"/>
+            <a:ext cx="10817352" cy="731520"/>
+          </a:xfrm>
+          <a:prstGeom prst="rect">
+            <a:avLst/>
+          </a:prstGeom>
+          <a:noFill/>
+        </p:spPr>
+        <p:txBody>
+          <a:bodyPr wrap="square" lIns="0" tIns="0" rIns="0" bIns="0">
+            <a:spAutoFit/>
+          </a:bodyPr>
+          <a:lstStyle/>
+          <a:p>
+            <a:pPr>
+              <a:defRPr sz="3200" b="1">
+                <a:solidFill>
+                  <a:srgbClr val="38BDF8"/>
+                </a:solidFill>
+                <a:latin typeface="Inter"/>
+              </a:defRPr>
+            </a:pPr>
+            <a:r>
+              <a:t>Windows Startup Integration</a:t>
+            </a:r>
+          </a:p>
+        </p:txBody>
+      </p:sp>
+      <p:sp>
+        <p:nvSpPr>
+          <p:cNvPr id="3" name="TextBox 2"/>
+          <p:cNvSpPr txBox="1"/>
+          <p:nvPr/>
+        </p:nvSpPr>
+        <p:spPr>
+          <a:xfrm>
+            <a:off x="685800" y="1463040"/>
+            <a:ext cx="5486400" cy="4572000"/>
+          </a:xfrm>
+          <a:prstGeom prst="rect">
+            <a:avLst/>
+          </a:prstGeom>
+          <a:noFill/>
+        </p:spPr>
+        <p:txBody>
+          <a:bodyPr wrap="square">
+            <a:spAutoFit/>
+          </a:bodyPr>
+          <a:lstStyle/>
+          <a:p>
+            <a:pPr>
+              <a:spcAft>
+                <a:spcPts val="1600"/>
+              </a:spcAft>
+              <a:defRPr sz="1800" b="0">
+                <a:solidFill>
+                  <a:srgbClr val="F1F5F9"/>
+                </a:solidFill>
+                <a:latin typeface="Inter"/>
+              </a:defRPr>
+            </a:pPr>
+            <a:r>
+              <a:t>Automated PowerShell installers manage continuous service runs:</a:t>
+            </a:r>
+          </a:p>
+          <a:p>
+            <a:pPr>
+              <a:spcAft>
+                <a:spcPts val="400"/>
+              </a:spcAft>
+              <a:defRPr sz="1600" b="1">
+                <a:solidFill>
+                  <a:srgbClr val="38BDF8"/>
+                </a:solidFill>
+                <a:latin typeface="Inter"/>
+              </a:defRPr>
+            </a:pPr>
+            <a:r>
+              <a:t>• register_startup.ps1</a:t>
+            </a:r>
+          </a:p>
+          <a:p>
+            <a:pPr>
+              <a:spcAft>
+                <a:spcPts val="1400"/>
+              </a:spcAft>
+              <a:defRPr sz="1400" b="0">
+                <a:solidFill>
+                  <a:srgbClr val="94A3B8"/>
+                </a:solidFill>
+                <a:latin typeface="Inter"/>
+              </a:defRPr>
+            </a:pPr>
+            <a:r>
+              <a:t>  Creates a logon shortcut in the Windows Startup directory that runs powershell.exe with a hidden window, executing main.py silently in the background.</a:t>
+            </a:r>
+          </a:p>
+          <a:p>
+            <a:pPr>
+              <a:spcAft>
+                <a:spcPts val="400"/>
+              </a:spcAft>
+              <a:defRPr sz="1600" b="1">
+                <a:solidFill>
+                  <a:srgbClr val="38BDF8"/>
+                </a:solidFill>
+                <a:latin typeface="Inter"/>
+              </a:defRPr>
+            </a:pPr>
+            <a:r>
+              <a:t>• unregister_startup.ps1</a:t>
+            </a:r>
+          </a:p>
+          <a:p>
+            <a:pPr>
+              <a:spcAft>
+                <a:spcPts val="1400"/>
+              </a:spcAft>
+              <a:defRPr sz="1400" b="0">
+                <a:solidFill>
+                  <a:srgbClr val="94A3B8"/>
+                </a:solidFill>
+                <a:latin typeface="Inter"/>
+              </a:defRPr>
+            </a:pPr>
+            <a:r>
+              <a:t>  Instantly searches for running background python.exe processes executing main.py, terminates them, and deletes the Startup folder shortcut.</a:t>
+            </a:r>
+          </a:p>
+          <a:p>
+            <a:pPr>
+              <a:spcAft>
+                <a:spcPts val="400"/>
+              </a:spcAft>
+              <a:defRPr sz="1600" b="1">
+                <a:solidFill>
+                  <a:srgbClr val="38BDF8"/>
+                </a:solidFill>
+                <a:latin typeface="Inter"/>
+              </a:defRPr>
+            </a:pPr>
+            <a:r>
+              <a:t>• Dynamic Logs Folder</a:t>
+            </a:r>
+          </a:p>
+          <a:p>
+            <a:pPr>
+              <a:spcAft>
+                <a:spcPts val="0"/>
+              </a:spcAft>
+              <a:defRPr sz="1400" b="0">
+                <a:solidFill>
+                  <a:srgbClr val="94A3B8"/>
+                </a:solidFill>
+                <a:latin typeface="Inter"/>
+              </a:defRPr>
+            </a:pPr>
+            <a:r>
+              <a:t>  Creates logs and execution logs in C:\Users\...\Documents\LAFO logs, ensuring zero-pollution in project structures.</a:t>
+            </a:r>
+          </a:p>
+        </p:txBody>
+      </p:sp>
+      <p:sp>
+        <p:nvSpPr>
+          <p:cNvPr id="4" name="Rounded Rectangle 3"/>
+          <p:cNvSpPr/>
+          <p:nvPr/>
+        </p:nvSpPr>
+        <p:spPr>
+          <a:xfrm>
+            <a:off x="6583680" y="1645920"/>
+            <a:ext cx="4919472" cy="4114800"/>
+          </a:xfrm>
+          <a:prstGeom prst="roundRect">
+            <a:avLst/>
+          </a:prstGeom>
+          <a:solidFill>
+            <a:srgbClr val="161D30"/>
+          </a:solidFill>
+          <a:ln>
+            <a:solidFill>
+              <a:srgbClr val="28324B"/>
+            </a:solidFill>
+          </a:ln>
+        </p:spPr>
+        <p:style>
+          <a:lnRef idx="1">
+            <a:schemeClr val="accent1"/>
+          </a:lnRef>
+          <a:fillRef idx="3">
+            <a:schemeClr val="accent1"/>
+          </a:fillRef>
+          <a:effectRef idx="2">
+            <a:schemeClr val="accent1"/>
+          </a:effectRef>
+          <a:fontRef idx="minor">
+            <a:schemeClr val="lt1"/>
+          </a:fontRef>
+        </p:style>
+        <p:txBody>
+          <a:bodyPr rtlCol="0" anchor="ctr"/>
+          <a:lstStyle/>
+          <a:p>
+            <a:pPr algn="ctr"/>
+            <a:endParaRPr/>
+          </a:p>
+        </p:txBody>
+      </p:sp>
+      <p:sp>
+        <p:nvSpPr>
+          <p:cNvPr id="5" name="TextBox 4"/>
+          <p:cNvSpPr txBox="1"/>
+          <p:nvPr/>
+        </p:nvSpPr>
+        <p:spPr>
+          <a:xfrm>
+            <a:off x="6720840" y="2011680"/>
+            <a:ext cx="4645152" cy="3474720"/>
+          </a:xfrm>
+          <a:prstGeom prst="rect">
+            <a:avLst/>
+          </a:prstGeom>
+          <a:noFill/>
+        </p:spPr>
+        <p:txBody>
+          <a:bodyPr wrap="square">
+            <a:spAutoFit/>
+          </a:bodyPr>
+          <a:lstStyle/>
+          <a:p>
+            <a:pPr>
+              <a:spcAft>
+                <a:spcPts val="1400"/>
+              </a:spcAft>
+              <a:defRPr sz="1200" b="1">
+                <a:solidFill>
+                  <a:srgbClr val="22C55E"/>
+                </a:solidFill>
+                <a:latin typeface="Consolas"/>
+              </a:defRPr>
+            </a:pPr>
+            <a:r>
+              <a:t>POWERSHELL SERVICE DEPLOYMENT</a:t>
+            </a:r>
+          </a:p>
+          <a:p>
+            <a:pPr>
+              <a:spcAft>
+                <a:spcPts val="0"/>
+              </a:spcAft>
+              <a:defRPr sz="1200" b="0">
+                <a:solidFill>
+                  <a:srgbClr val="F1F5F9"/>
+                </a:solidFill>
+                <a:latin typeface="Consolas"/>
+              </a:defRPr>
+            </a:pPr>
+            <a:r>
+              <a:t># 1. Set Execution Policy</a:t>
+            </a:r>
+            <a:br/>
+            <a:r>
+              <a:t>Set-ExecutionPolicy Bypass -Scope Process</a:t>
+            </a:r>
+            <a:br/>
+            <a:br/>
+            <a:r>
+              <a:t># 2. Run background registration</a:t>
+            </a:r>
+            <a:br/>
+            <a:r>
+              <a:t>.\register_startup.ps1</a:t>
+            </a:r>
+            <a:br/>
+            <a:br/>
+            <a:r>
+              <a:t># 3. Check background status</a:t>
+            </a:r>
+            <a:br/>
+            <a:r>
+              <a:t>Get-CimInstance Win32_Process -Filter \</a:t>
+            </a:r>
+            <a:br/>
+            <a:r>
+              <a:t>'Name="python.exe" and CommandLine like "%main.py%"'</a:t>
+            </a:r>
+          </a:p>
+        </p:txBody>
+      </p:sp>
+    </p:spTree>
+  </p:cSld>
+  <p:clrMapOvr>
+    <a:masterClrMapping/>
+  </p:clrMapOvr>
+  <p:transition spd="slow">
+    <p:wipe/>
+  </p:transition>
+</p:sld>
+</file>
+
+<file path=ppt/slides/slide8.xml><?xml version="1.0" encoding="utf-8"?>
+<p:sld xmlns:a="http://schemas.openxmlformats.org/drawingml/2006/main" xmlns:r="http://schemas.openxmlformats.org/officeDocument/2006/relationships" xmlns:p="http://schemas.openxmlformats.org/presentationml/2006/main">
+  <p:cSld>
+    <p:bg>
+      <p:bgPr>
+        <a:solidFill>
+          <a:srgbClr val="0B0F19"/>
+        </a:solidFill>
+        <a:effectLst/>
+      </p:bgPr>
+    </p:bg>
+    <p:spTree>
+      <p:nvGrpSpPr>
+        <p:cNvPr id="1" name=""/>
+        <p:cNvGrpSpPr/>
+        <p:nvPr/>
+      </p:nvGrpSpPr>
+      <p:grpSpPr>
+        <a:xfrm>
+          <a:off x="0" y="0"/>
+          <a:ext cx="0" cy="0"/>
+          <a:chOff x="0" y="0"/>
+          <a:chExt cx="0" cy="0"/>
+        </a:xfrm>
+      </p:grpSpPr>
       <p:sp>
         <p:nvSpPr>
           <p:cNvPr id="2" name="Rectangle 1"/>
@@ -3145,6 +5712,7 @@
           <a:lstStyle/>
           <a:p>
             <a:pPr algn="ctr"/>
+            <a:endParaRPr/>
           </a:p>
         </p:txBody>
       </p:sp>
@@ -3157,7 +5725,7 @@
         <p:spPr>
           <a:xfrm>
             <a:off x="1828800" y="1920240"/>
-            <a:ext cx="8531352" cy="2011680"/>
+            <a:ext cx="8531352" cy="2349361"/>
           </a:xfrm>
           <a:prstGeom prst="rect">
             <a:avLst/>
@@ -3176,21 +5744,30 @@
               </a:spcAft>
               <a:defRPr sz="1200" b="1">
                 <a:solidFill>
-                  <a:srgbClr val="C084FC"/>
-                </a:solidFill>
-                <a:latin typeface="Inter"/>
-              </a:defRPr>
-            </a:pPr>
-            <a:r>
-              <a:t>100% PRIVATE &amp; OFFLINE INTELLIGENCE</a:t>
-            </a:r>
-          </a:p>
-          <a:p>
-            <a:pPr>
-              <a:spcAft>
-                <a:spcPts val="400"/>
-              </a:spcAft>
-              <a:defRPr sz="5400" b="1">
+                  <a:srgbClr val="22C55E"/>
+                </a:solidFill>
+                <a:latin typeface="Inter"/>
+              </a:defRPr>
+            </a:pPr>
+            <a:r>
+              <a:rPr dirty="0"/>
+              <a:t>VERSION 1.3 RELE</a:t>
+            </a:r>
+            <a:r>
+              <a:rPr lang="en-IN" dirty="0"/>
+              <a:t>A</a:t>
+            </a:r>
+            <a:r>
+              <a:rPr dirty="0"/>
+              <a:t>SE-READY</a:t>
+            </a:r>
+          </a:p>
+          <a:p>
+            <a:pPr>
+              <a:spcAft>
+                <a:spcPts val="1600"/>
+              </a:spcAft>
+              <a:defRPr sz="4200" b="1">
                 <a:solidFill>
                   <a:srgbClr val="38BDF8"/>
                 </a:solidFill>
@@ -3198,23 +5775,39 @@
               </a:defRPr>
             </a:pPr>
             <a:r>
-              <a:t>LAFO</a:t>
-            </a:r>
-          </a:p>
-          <a:p>
-            <a:pPr>
-              <a:spcAft>
-                <a:spcPts val="1400"/>
-              </a:spcAft>
-              <a:defRPr sz="2400" b="1">
+              <a:rPr dirty="0"/>
+              <a:t>LAFO Project Metrics</a:t>
+            </a:r>
+          </a:p>
+          <a:p>
+            <a:pPr>
+              <a:spcAft>
+                <a:spcPts val="2000"/>
+              </a:spcAft>
+              <a:defRPr sz="1400" b="1">
                 <a:solidFill>
                   <a:srgbClr val="F1F5F9"/>
                 </a:solidFill>
-                <a:latin typeface="Inter"/>
-              </a:defRPr>
-            </a:pPr>
-            <a:r>
-              <a:t>Local Agentic File Organizer</a:t>
+                <a:latin typeface="Consolas"/>
+              </a:defRPr>
+            </a:pPr>
+            <a:r>
+              <a:rPr dirty="0"/>
+              <a:t>• 2,575 Lines of Core Code    |    • 2,200+ Lines of Technical Docs</a:t>
+            </a:r>
+            <a:br>
+              <a:rPr dirty="0"/>
+            </a:br>
+            <a:r>
+              <a:rPr dirty="0"/>
+              <a:t>• 40+ Features Completed      |    • &lt;15s Processing Speed / File</a:t>
+            </a:r>
+            <a:br>
+              <a:rPr dirty="0"/>
+            </a:br>
+            <a:r>
+              <a:rPr dirty="0"/>
+              <a:t>• 100% Local Privacy          |    • Windows Service Enabled</a:t>
             </a:r>
           </a:p>
           <a:p>
@@ -3230,46 +5823,8 @@
               </a:defRPr>
             </a:pPr>
             <a:r>
-              <a:t>Automatically monitors, extracts content, classifies, renames, and moves files using local LLMs &amp; Vector DBs.</a:t>
-            </a:r>
-          </a:p>
-        </p:txBody>
-      </p:sp>
-      <p:sp>
-        <p:nvSpPr>
-          <p:cNvPr id="4" name="TextBox 3"/>
-          <p:cNvSpPr txBox="1"/>
-          <p:nvPr/>
-        </p:nvSpPr>
-        <p:spPr>
-          <a:xfrm>
-            <a:off x="1828800" y="4297680"/>
-            <a:ext cx="8531352" cy="548640"/>
-          </a:xfrm>
-          <a:prstGeom prst="rect">
-            <a:avLst/>
-          </a:prstGeom>
-          <a:noFill/>
-        </p:spPr>
-        <p:txBody>
-          <a:bodyPr wrap="none">
-            <a:spAutoFit/>
-          </a:bodyPr>
-          <a:lstStyle/>
-          <a:p>
-            <a:pPr>
-              <a:spcAft>
-                <a:spcPts val="0"/>
-              </a:spcAft>
-              <a:defRPr sz="1200" b="0">
-                <a:solidFill>
-                  <a:srgbClr val="22C55E"/>
-                </a:solidFill>
-                <a:latin typeface="Consolas"/>
-              </a:defRPr>
-            </a:pPr>
-            <a:r>
-              <a:t>🛡️ Zero Cloud Leakage    |    🧠 FAISS Pre-Filtering    |    🤖 local Llama 3 (Ollama)</a:t>
+              <a:rPr dirty="0"/>
+              <a:t>Fully production-ready for automated, secure, and offline file organization.</a:t>
             </a:r>
           </a:p>
         </p:txBody>
@@ -3279,2416 +5834,9 @@
   <p:clrMapOvr>
     <a:masterClrMapping/>
   </p:clrMapOvr>
-</p:sld>
-</file>
-
-<file path=ppt/slides/slide2.xml><?xml version="1.0" encoding="utf-8"?>
-<p:sld xmlns:a="http://schemas.openxmlformats.org/drawingml/2006/main" xmlns:p="http://schemas.openxmlformats.org/presentationml/2006/main" xmlns:r="http://schemas.openxmlformats.org/officeDocument/2006/relationships">
-  <p:cSld>
-    <p:bg>
-      <p:bgPr>
-        <a:solidFill>
-          <a:srgbClr val="0B0F19"/>
-        </a:solidFill>
-        <a:effectLst/>
-      </p:bgPr>
-    </p:bg>
-    <p:spTree>
-      <p:nvGrpSpPr>
-        <p:cNvPr id="1" name=""/>
-        <p:cNvGrpSpPr/>
-        <p:nvPr/>
-      </p:nvGrpSpPr>
-      <p:grpSpPr/>
-      <p:sp>
-        <p:nvSpPr>
-          <p:cNvPr id="2" name="TextBox 1"/>
-          <p:cNvSpPr txBox="1"/>
-          <p:nvPr/>
-        </p:nvSpPr>
-        <p:spPr>
-          <a:xfrm>
-            <a:off x="685800" y="457200"/>
-            <a:ext cx="10817352" cy="731520"/>
-          </a:xfrm>
-          <a:prstGeom prst="rect">
-            <a:avLst/>
-          </a:prstGeom>
-          <a:noFill/>
-        </p:spPr>
-        <p:txBody>
-          <a:bodyPr wrap="square" lIns="0" tIns="0" bIns="0" rIns="0">
-            <a:spAutoFit/>
-          </a:bodyPr>
-          <a:lstStyle/>
-          <a:p>
-            <a:pPr>
-              <a:defRPr sz="3200" b="1">
-                <a:solidFill>
-                  <a:srgbClr val="38BDF8"/>
-                </a:solidFill>
-                <a:latin typeface="Inter"/>
-              </a:defRPr>
-            </a:pPr>
-            <a:r>
-              <a:t>The Core Ingestion Problem</a:t>
-            </a:r>
-          </a:p>
-        </p:txBody>
-      </p:sp>
-      <p:sp>
-        <p:nvSpPr>
-          <p:cNvPr id="3" name="TextBox 2"/>
-          <p:cNvSpPr txBox="1"/>
-          <p:nvPr/>
-        </p:nvSpPr>
-        <p:spPr>
-          <a:xfrm>
-            <a:off x="685800" y="1463040"/>
-            <a:ext cx="6400800" cy="4572000"/>
-          </a:xfrm>
-          <a:prstGeom prst="rect">
-            <a:avLst/>
-          </a:prstGeom>
-          <a:noFill/>
-        </p:spPr>
-        <p:txBody>
-          <a:bodyPr wrap="square">
-            <a:spAutoFit/>
-          </a:bodyPr>
-          <a:lstStyle/>
-          <a:p>
-            <a:pPr>
-              <a:spcAft>
-                <a:spcPts val="1600"/>
-              </a:spcAft>
-              <a:defRPr sz="1800" b="0">
-                <a:solidFill>
-                  <a:srgbClr val="F1F5F9"/>
-                </a:solidFill>
-                <a:latin typeface="Inter"/>
-              </a:defRPr>
-            </a:pPr>
-            <a:r>
-              <a:t>Manual file organization is a critical, time-consuming drag:</a:t>
-            </a:r>
-          </a:p>
-          <a:p>
-            <a:pPr>
-              <a:spcAft>
-                <a:spcPts val="400"/>
-              </a:spcAft>
-              <a:defRPr sz="1600" b="1">
-                <a:solidFill>
-                  <a:srgbClr val="C084FC"/>
-                </a:solidFill>
-                <a:latin typeface="Inter"/>
-              </a:defRPr>
-            </a:pPr>
-            <a:r>
-              <a:t>• Unstructured Downloads Folder</a:t>
-            </a:r>
-          </a:p>
-          <a:p>
-            <a:pPr>
-              <a:spcAft>
-                <a:spcPts val="1400"/>
-              </a:spcAft>
-              <a:defRPr sz="1400" b="0">
-                <a:solidFill>
-                  <a:srgbClr val="94A3B8"/>
-                </a:solidFill>
-                <a:latin typeface="Inter"/>
-              </a:defRPr>
-            </a:pPr>
-            <a:r>
-              <a:t>  Browser downloads clog up your directories with invoices, tax forms, reports, and bills mixed together.</a:t>
-            </a:r>
-          </a:p>
-          <a:p>
-            <a:pPr>
-              <a:spcAft>
-                <a:spcPts val="400"/>
-              </a:spcAft>
-              <a:defRPr sz="1600" b="1">
-                <a:solidFill>
-                  <a:srgbClr val="C084FC"/>
-                </a:solidFill>
-                <a:latin typeface="Inter"/>
-              </a:defRPr>
-            </a:pPr>
-            <a:r>
-              <a:t>• Cloud Data Exposure / Privacy Leakage</a:t>
-            </a:r>
-          </a:p>
-          <a:p>
-            <a:pPr>
-              <a:spcAft>
-                <a:spcPts val="1400"/>
-              </a:spcAft>
-              <a:defRPr sz="1400" b="0">
-                <a:solidFill>
-                  <a:srgbClr val="94A3B8"/>
-                </a:solidFill>
-                <a:latin typeface="Inter"/>
-              </a:defRPr>
-            </a:pPr>
-            <a:r>
-              <a:t>  Uploading sensitive papers (pension letters, bank statements, asset documents) to online AI platforms leaks personal metadata.</a:t>
-            </a:r>
-          </a:p>
-          <a:p>
-            <a:pPr>
-              <a:spcAft>
-                <a:spcPts val="400"/>
-              </a:spcAft>
-              <a:defRPr sz="1600" b="1">
-                <a:solidFill>
-                  <a:srgbClr val="C084FC"/>
-                </a:solidFill>
-                <a:latin typeface="Inter"/>
-              </a:defRPr>
-            </a:pPr>
-            <a:r>
-              <a:t>• Model Timeout on Heavy Taxonomies</a:t>
-            </a:r>
-          </a:p>
-          <a:p>
-            <a:pPr>
-              <a:spcAft>
-                <a:spcPts val="0"/>
-              </a:spcAft>
-              <a:defRPr sz="1400" b="0">
-                <a:solidFill>
-                  <a:srgbClr val="94A3B8"/>
-                </a:solidFill>
-                <a:latin typeface="Inter"/>
-              </a:defRPr>
-            </a:pPr>
-            <a:r>
-              <a:t>  Passing large folder structures (e.g. 302 categories) directly to a local CPU-based LLM causes severe latency and prompt timeout crashes.</a:t>
-            </a:r>
-          </a:p>
-        </p:txBody>
-      </p:sp>
-      <p:sp>
-        <p:nvSpPr>
-          <p:cNvPr id="4" name="Rounded Rectangle 3"/>
-          <p:cNvSpPr/>
-          <p:nvPr/>
-        </p:nvSpPr>
-        <p:spPr>
-          <a:xfrm>
-            <a:off x="7589520" y="1645920"/>
-            <a:ext cx="3913632" cy="4114800"/>
-          </a:xfrm>
-          <a:prstGeom prst="roundRect">
-            <a:avLst/>
-          </a:prstGeom>
-          <a:solidFill>
-            <a:srgbClr val="161D30"/>
-          </a:solidFill>
-          <a:ln>
-            <a:solidFill>
-              <a:srgbClr val="28324B"/>
-            </a:solidFill>
-          </a:ln>
-        </p:spPr>
-        <p:style>
-          <a:lnRef idx="1">
-            <a:schemeClr val="accent1"/>
-          </a:lnRef>
-          <a:fillRef idx="3">
-            <a:schemeClr val="accent1"/>
-          </a:fillRef>
-          <a:effectRef idx="2">
-            <a:schemeClr val="accent1"/>
-          </a:effectRef>
-          <a:fontRef idx="minor">
-            <a:schemeClr val="lt1"/>
-          </a:fontRef>
-        </p:style>
-        <p:txBody>
-          <a:bodyPr rtlCol="0" anchor="ctr"/>
-          <a:lstStyle/>
-          <a:p>
-            <a:pPr algn="ctr"/>
-          </a:p>
-        </p:txBody>
-      </p:sp>
-      <p:sp>
-        <p:nvSpPr>
-          <p:cNvPr id="5" name="TextBox 4"/>
-          <p:cNvSpPr txBox="1"/>
-          <p:nvPr/>
-        </p:nvSpPr>
-        <p:spPr>
-          <a:xfrm>
-            <a:off x="7772400" y="2011680"/>
-            <a:ext cx="3547872" cy="3474720"/>
-          </a:xfrm>
-          <a:prstGeom prst="rect">
-            <a:avLst/>
-          </a:prstGeom>
-          <a:noFill/>
-        </p:spPr>
-        <p:txBody>
-          <a:bodyPr wrap="square">
-            <a:spAutoFit/>
-          </a:bodyPr>
-          <a:lstStyle/>
-          <a:p>
-            <a:pPr>
-              <a:spcAft>
-                <a:spcPts val="1400"/>
-              </a:spcAft>
-              <a:defRPr sz="1200" b="1">
-                <a:solidFill>
-                  <a:srgbClr val="C084FC"/>
-                </a:solidFill>
-                <a:latin typeface="Inter"/>
-              </a:defRPr>
-            </a:pPr>
-            <a:r>
-              <a:t>CRITICAL METRIC</a:t>
-            </a:r>
-          </a:p>
-          <a:p>
-            <a:pPr>
-              <a:spcAft>
-                <a:spcPts val="400"/>
-              </a:spcAft>
-              <a:defRPr sz="4800" b="1">
-                <a:solidFill>
-                  <a:srgbClr val="38BDF8"/>
-                </a:solidFill>
-                <a:latin typeface="Inter"/>
-              </a:defRPr>
-            </a:pPr>
-            <a:r>
-              <a:t>302</a:t>
-            </a:r>
-          </a:p>
-          <a:p>
-            <a:pPr>
-              <a:spcAft>
-                <a:spcPts val="1400"/>
-              </a:spcAft>
-              <a:defRPr sz="1600" b="1">
-                <a:solidFill>
-                  <a:srgbClr val="F1F5F9"/>
-                </a:solidFill>
-                <a:latin typeface="Inter"/>
-              </a:defRPr>
-            </a:pPr>
-            <a:r>
-              <a:t>Destination Folders</a:t>
-            </a:r>
-          </a:p>
-          <a:p>
-            <a:pPr>
-              <a:spcAft>
-                <a:spcPts val="0"/>
-              </a:spcAft>
-              <a:defRPr sz="1300" b="0">
-                <a:solidFill>
-                  <a:srgbClr val="94A3B8"/>
-                </a:solidFill>
-                <a:latin typeface="Inter"/>
-              </a:defRPr>
-            </a:pPr>
-            <a:r>
-              <a:t>Passing this massive list of folders directly to Ollama creates a context of &gt;20,000 characters, leading to massive memory bloat and CPU processing timeouts.</a:t>
-            </a:r>
-          </a:p>
-        </p:txBody>
-      </p:sp>
-    </p:spTree>
-  </p:cSld>
-  <p:clrMapOvr>
-    <a:masterClrMapping/>
-  </p:clrMapOvr>
-</p:sld>
-</file>
-
-<file path=ppt/slides/slide3.xml><?xml version="1.0" encoding="utf-8"?>
-<p:sld xmlns:a="http://schemas.openxmlformats.org/drawingml/2006/main" xmlns:p="http://schemas.openxmlformats.org/presentationml/2006/main" xmlns:r="http://schemas.openxmlformats.org/officeDocument/2006/relationships">
-  <p:cSld>
-    <p:bg>
-      <p:bgPr>
-        <a:solidFill>
-          <a:srgbClr val="0B0F19"/>
-        </a:solidFill>
-        <a:effectLst/>
-      </p:bgPr>
-    </p:bg>
-    <p:spTree>
-      <p:nvGrpSpPr>
-        <p:cNvPr id="1" name=""/>
-        <p:cNvGrpSpPr/>
-        <p:nvPr/>
-      </p:nvGrpSpPr>
-      <p:grpSpPr/>
-      <p:sp>
-        <p:nvSpPr>
-          <p:cNvPr id="2" name="TextBox 1"/>
-          <p:cNvSpPr txBox="1"/>
-          <p:nvPr/>
-        </p:nvSpPr>
-        <p:spPr>
-          <a:xfrm>
-            <a:off x="685800" y="457200"/>
-            <a:ext cx="10817352" cy="731520"/>
-          </a:xfrm>
-          <a:prstGeom prst="rect">
-            <a:avLst/>
-          </a:prstGeom>
-          <a:noFill/>
-        </p:spPr>
-        <p:txBody>
-          <a:bodyPr wrap="square" lIns="0" tIns="0" bIns="0" rIns="0">
-            <a:spAutoFit/>
-          </a:bodyPr>
-          <a:lstStyle/>
-          <a:p>
-            <a:pPr>
-              <a:defRPr sz="3200" b="1">
-                <a:solidFill>
-                  <a:srgbClr val="38BDF8"/>
-                </a:solidFill>
-                <a:latin typeface="Inter"/>
-              </a:defRPr>
-            </a:pPr>
-            <a:r>
-              <a:t>The Privacy-First Solution</a:t>
-            </a:r>
-          </a:p>
-        </p:txBody>
-      </p:sp>
-      <p:sp>
-        <p:nvSpPr>
-          <p:cNvPr id="3" name="TextBox 2"/>
-          <p:cNvSpPr txBox="1"/>
-          <p:nvPr/>
-        </p:nvSpPr>
-        <p:spPr>
-          <a:xfrm>
-            <a:off x="685800" y="1463040"/>
-            <a:ext cx="6400800" cy="4572000"/>
-          </a:xfrm>
-          <a:prstGeom prst="rect">
-            <a:avLst/>
-          </a:prstGeom>
-          <a:noFill/>
-        </p:spPr>
-        <p:txBody>
-          <a:bodyPr wrap="square">
-            <a:spAutoFit/>
-          </a:bodyPr>
-          <a:lstStyle/>
-          <a:p>
-            <a:pPr>
-              <a:spcAft>
-                <a:spcPts val="1600"/>
-              </a:spcAft>
-              <a:defRPr sz="1800" b="0">
-                <a:solidFill>
-                  <a:srgbClr val="F1F5F9"/>
-                </a:solidFill>
-                <a:latin typeface="Inter"/>
-              </a:defRPr>
-            </a:pPr>
-            <a:r>
-              <a:t>LAFO operates as a secure, local background daemon:</a:t>
-            </a:r>
-          </a:p>
-          <a:p>
-            <a:pPr>
-              <a:spcAft>
-                <a:spcPts val="400"/>
-              </a:spcAft>
-              <a:defRPr sz="1600" b="1">
-                <a:solidFill>
-                  <a:srgbClr val="22C55E"/>
-                </a:solidFill>
-                <a:latin typeface="Inter"/>
-              </a:defRPr>
-            </a:pPr>
-            <a:r>
-              <a:t>✓ 100% Offline Processing</a:t>
-            </a:r>
-          </a:p>
-          <a:p>
-            <a:pPr>
-              <a:spcAft>
-                <a:spcPts val="1400"/>
-              </a:spcAft>
-              <a:defRPr sz="1400" b="0">
-                <a:solidFill>
-                  <a:srgbClr val="94A3B8"/>
-                </a:solidFill>
-                <a:latin typeface="Inter"/>
-              </a:defRPr>
-            </a:pPr>
-            <a:r>
-              <a:t>  All operations—from PDF extraction and vector searches to LLM routing—happen offline on localhost. No external telemetry.</a:t>
-            </a:r>
-          </a:p>
-          <a:p>
-            <a:pPr>
-              <a:spcAft>
-                <a:spcPts val="400"/>
-              </a:spcAft>
-              <a:defRPr sz="1600" b="1">
-                <a:solidFill>
-                  <a:srgbClr val="22C55E"/>
-                </a:solidFill>
-                <a:latin typeface="Inter"/>
-              </a:defRPr>
-            </a:pPr>
-            <a:r>
-              <a:t>✓ Autonomous Watchdog Observer</a:t>
-            </a:r>
-          </a:p>
-          <a:p>
-            <a:pPr>
-              <a:spcAft>
-                <a:spcPts val="1400"/>
-              </a:spcAft>
-              <a:defRPr sz="1400" b="0">
-                <a:solidFill>
-                  <a:srgbClr val="94A3B8"/>
-                </a:solidFill>
-                <a:latin typeface="Inter"/>
-              </a:defRPr>
-            </a:pPr>
-            <a:r>
-              <a:t>  Runs quietly in the system tray, scanning for file creations or browser rename events, queuing tasks to concurrent worker threads.</a:t>
-            </a:r>
-          </a:p>
-          <a:p>
-            <a:pPr>
-              <a:spcAft>
-                <a:spcPts val="400"/>
-              </a:spcAft>
-              <a:defRPr sz="1600" b="1">
-                <a:solidFill>
-                  <a:srgbClr val="22C55E"/>
-                </a:solidFill>
-                <a:latin typeface="Inter"/>
-              </a:defRPr>
-            </a:pPr>
-            <a:r>
-              <a:t>✓ Smart Operations &amp; Deduplication</a:t>
-            </a:r>
-          </a:p>
-          <a:p>
-            <a:pPr>
-              <a:spcAft>
-                <a:spcPts val="0"/>
-              </a:spcAft>
-              <a:defRPr sz="1400" b="0">
-                <a:solidFill>
-                  <a:srgbClr val="94A3B8"/>
-                </a:solidFill>
-                <a:latin typeface="Inter"/>
-              </a:defRPr>
-            </a:pPr>
-            <a:r>
-              <a:t>  Auto-renames files semantically based on text content and extracted dates. Pre-checks SHA-256 hashes to filter out redundant file moves.</a:t>
-            </a:r>
-          </a:p>
-        </p:txBody>
-      </p:sp>
-      <p:sp>
-        <p:nvSpPr>
-          <p:cNvPr id="4" name="Rounded Rectangle 3"/>
-          <p:cNvSpPr/>
-          <p:nvPr/>
-        </p:nvSpPr>
-        <p:spPr>
-          <a:xfrm>
-            <a:off x="7589520" y="1645920"/>
-            <a:ext cx="3913632" cy="4114800"/>
-          </a:xfrm>
-          <a:prstGeom prst="roundRect">
-            <a:avLst/>
-          </a:prstGeom>
-          <a:solidFill>
-            <a:srgbClr val="161D30"/>
-          </a:solidFill>
-          <a:ln>
-            <a:solidFill>
-              <a:srgbClr val="28324B"/>
-            </a:solidFill>
-          </a:ln>
-        </p:spPr>
-        <p:style>
-          <a:lnRef idx="1">
-            <a:schemeClr val="accent1"/>
-          </a:lnRef>
-          <a:fillRef idx="3">
-            <a:schemeClr val="accent1"/>
-          </a:fillRef>
-          <a:effectRef idx="2">
-            <a:schemeClr val="accent1"/>
-          </a:effectRef>
-          <a:fontRef idx="minor">
-            <a:schemeClr val="lt1"/>
-          </a:fontRef>
-        </p:style>
-        <p:txBody>
-          <a:bodyPr rtlCol="0" anchor="ctr"/>
-          <a:lstStyle/>
-          <a:p>
-            <a:pPr algn="ctr"/>
-          </a:p>
-        </p:txBody>
-      </p:sp>
-      <p:sp>
-        <p:nvSpPr>
-          <p:cNvPr id="5" name="TextBox 4"/>
-          <p:cNvSpPr txBox="1"/>
-          <p:nvPr/>
-        </p:nvSpPr>
-        <p:spPr>
-          <a:xfrm>
-            <a:off x="7772400" y="2011680"/>
-            <a:ext cx="3547872" cy="3474720"/>
-          </a:xfrm>
-          <a:prstGeom prst="rect">
-            <a:avLst/>
-          </a:prstGeom>
-          <a:noFill/>
-        </p:spPr>
-        <p:txBody>
-          <a:bodyPr wrap="square">
-            <a:spAutoFit/>
-          </a:bodyPr>
-          <a:lstStyle/>
-          <a:p>
-            <a:pPr>
-              <a:spcAft>
-                <a:spcPts val="1400"/>
-              </a:spcAft>
-              <a:defRPr sz="1200" b="1">
-                <a:solidFill>
-                  <a:srgbClr val="22C55E"/>
-                </a:solidFill>
-                <a:latin typeface="Inter"/>
-              </a:defRPr>
-            </a:pPr>
-            <a:r>
-              <a:t>SECURITY AUDIT</a:t>
-            </a:r>
-          </a:p>
-          <a:p>
-            <a:pPr>
-              <a:spcAft>
-                <a:spcPts val="400"/>
-              </a:spcAft>
-              <a:defRPr sz="4200" b="1">
-                <a:solidFill>
-                  <a:srgbClr val="22C55E"/>
-                </a:solidFill>
-                <a:latin typeface="Inter"/>
-              </a:defRPr>
-            </a:pPr>
-            <a:r>
-              <a:t>SECURE</a:t>
-            </a:r>
-          </a:p>
-          <a:p>
-            <a:pPr>
-              <a:spcAft>
-                <a:spcPts val="1400"/>
-              </a:spcAft>
-              <a:defRPr sz="1600" b="1">
-                <a:solidFill>
-                  <a:srgbClr val="F1F5F9"/>
-                </a:solidFill>
-                <a:latin typeface="Inter"/>
-              </a:defRPr>
-            </a:pPr>
-            <a:r>
-              <a:t>Local Sandboxed Runs</a:t>
-            </a:r>
-          </a:p>
-          <a:p>
-            <a:pPr>
-              <a:spcAft>
-                <a:spcPts val="0"/>
-              </a:spcAft>
-              <a:defRPr sz="1200" b="0">
-                <a:solidFill>
-                  <a:srgbClr val="94A3B8"/>
-                </a:solidFill>
-                <a:latin typeface="Consolas"/>
-              </a:defRPr>
-            </a:pPr>
-            <a:r>
-              <a:t>• Path names remain local</a:t>
-            </a:r>
-            <a:br/>
-            <a:r>
-              <a:t>• Document strings never uploaded</a:t>
-            </a:r>
-            <a:br/>
-            <a:r>
-              <a:t>• Logs cached locally in user folder</a:t>
-            </a:r>
-            <a:br/>
-            <a:r>
-              <a:t>• Full compliance with offline environments</a:t>
-            </a:r>
-          </a:p>
-        </p:txBody>
-      </p:sp>
-    </p:spTree>
-  </p:cSld>
-  <p:clrMapOvr>
-    <a:masterClrMapping/>
-  </p:clrMapOvr>
-</p:sld>
-</file>
-
-<file path=ppt/slides/slide4.xml><?xml version="1.0" encoding="utf-8"?>
-<p:sld xmlns:a="http://schemas.openxmlformats.org/drawingml/2006/main" xmlns:p="http://schemas.openxmlformats.org/presentationml/2006/main" xmlns:r="http://schemas.openxmlformats.org/officeDocument/2006/relationships">
-  <p:cSld>
-    <p:bg>
-      <p:bgPr>
-        <a:solidFill>
-          <a:srgbClr val="0B0F19"/>
-        </a:solidFill>
-        <a:effectLst/>
-      </p:bgPr>
-    </p:bg>
-    <p:spTree>
-      <p:nvGrpSpPr>
-        <p:cNvPr id="1" name=""/>
-        <p:cNvGrpSpPr/>
-        <p:nvPr/>
-      </p:nvGrpSpPr>
-      <p:grpSpPr/>
-      <p:sp>
-        <p:nvSpPr>
-          <p:cNvPr id="2" name="TextBox 1"/>
-          <p:cNvSpPr txBox="1"/>
-          <p:nvPr/>
-        </p:nvSpPr>
-        <p:spPr>
-          <a:xfrm>
-            <a:off x="685800" y="457200"/>
-            <a:ext cx="10817352" cy="731520"/>
-          </a:xfrm>
-          <a:prstGeom prst="rect">
-            <a:avLst/>
-          </a:prstGeom>
-          <a:noFill/>
-        </p:spPr>
-        <p:txBody>
-          <a:bodyPr wrap="square" lIns="0" tIns="0" bIns="0" rIns="0">
-            <a:spAutoFit/>
-          </a:bodyPr>
-          <a:lstStyle/>
-          <a:p>
-            <a:pPr>
-              <a:defRPr sz="3200" b="1">
-                <a:solidFill>
-                  <a:srgbClr val="38BDF8"/>
-                </a:solidFill>
-                <a:latin typeface="Inter"/>
-              </a:defRPr>
-            </a:pPr>
-            <a:r>
-              <a:t>Data Flow Architecture</a:t>
-            </a:r>
-          </a:p>
-        </p:txBody>
-      </p:sp>
-      <p:sp>
-        <p:nvSpPr>
-          <p:cNvPr id="3" name="TextBox 2"/>
-          <p:cNvSpPr txBox="1"/>
-          <p:nvPr/>
-        </p:nvSpPr>
-        <p:spPr>
-          <a:xfrm>
-            <a:off x="685800" y="1463040"/>
-            <a:ext cx="5486400" cy="4572000"/>
-          </a:xfrm>
-          <a:prstGeom prst="rect">
-            <a:avLst/>
-          </a:prstGeom>
-          <a:noFill/>
-        </p:spPr>
-        <p:txBody>
-          <a:bodyPr wrap="square">
-            <a:spAutoFit/>
-          </a:bodyPr>
-          <a:lstStyle/>
-          <a:p>
-            <a:pPr>
-              <a:spcAft>
-                <a:spcPts val="1600"/>
-              </a:spcAft>
-              <a:defRPr sz="1800" b="0">
-                <a:solidFill>
-                  <a:srgbClr val="F1F5F9"/>
-                </a:solidFill>
-                <a:latin typeface="Inter"/>
-              </a:defRPr>
-            </a:pPr>
-            <a:r>
-              <a:t>LAFO manages ingestion through 5 sequential phases:</a:t>
-            </a:r>
-          </a:p>
-          <a:p>
-            <a:pPr>
-              <a:spcAft>
-                <a:spcPts val="200"/>
-              </a:spcAft>
-              <a:defRPr sz="1500" b="1">
-                <a:solidFill>
-                  <a:srgbClr val="38BDF8"/>
-                </a:solidFill>
-                <a:latin typeface="Inter"/>
-              </a:defRPr>
-            </a:pPr>
-            <a:r>
-              <a:t>1. File Stability Verification:</a:t>
-            </a:r>
-          </a:p>
-          <a:p>
-            <a:pPr>
-              <a:spcAft>
-                <a:spcPts val="800"/>
-              </a:spcAft>
-              <a:defRPr sz="1300" b="0">
-                <a:solidFill>
-                  <a:srgbClr val="94A3B8"/>
-                </a:solidFill>
-                <a:latin typeface="Inter"/>
-              </a:defRPr>
-            </a:pPr>
-            <a:r>
-              <a:t>   Watchdog catches files and waits for write operations to lock/complete.</a:t>
-            </a:r>
-          </a:p>
-          <a:p>
-            <a:pPr>
-              <a:spcAft>
-                <a:spcPts val="200"/>
-              </a:spcAft>
-              <a:defRPr sz="1500" b="1">
-                <a:solidFill>
-                  <a:srgbClr val="38BDF8"/>
-                </a:solidFill>
-                <a:latin typeface="Inter"/>
-              </a:defRPr>
-            </a:pPr>
-            <a:r>
-              <a:t>2. FAISS Vector Search Pre-Filtering:</a:t>
-            </a:r>
-          </a:p>
-          <a:p>
-            <a:pPr>
-              <a:spcAft>
-                <a:spcPts val="800"/>
-              </a:spcAft>
-              <a:defRPr sz="1300" b="0">
-                <a:solidFill>
-                  <a:srgbClr val="94A3B8"/>
-                </a:solidFill>
-                <a:latin typeface="Inter"/>
-              </a:defRPr>
-            </a:pPr>
-            <a:r>
-              <a:t>   Matches file text against indexed directory names &amp; file exemplars.</a:t>
-            </a:r>
-          </a:p>
-          <a:p>
-            <a:pPr>
-              <a:spcAft>
-                <a:spcPts val="200"/>
-              </a:spcAft>
-              <a:defRPr sz="1500" b="1">
-                <a:solidFill>
-                  <a:srgbClr val="38BDF8"/>
-                </a:solidFill>
-                <a:latin typeface="Inter"/>
-              </a:defRPr>
-            </a:pPr>
-            <a:r>
-              <a:t>3. Candidate Narrowing:</a:t>
-            </a:r>
-          </a:p>
-          <a:p>
-            <a:pPr>
-              <a:spcAft>
-                <a:spcPts val="800"/>
-              </a:spcAft>
-              <a:defRPr sz="1300" b="0">
-                <a:solidFill>
-                  <a:srgbClr val="94A3B8"/>
-                </a:solidFill>
-                <a:latin typeface="Inter"/>
-              </a:defRPr>
-            </a:pPr>
-            <a:r>
-              <a:t>   Reduces the 302 categories down to the top 3-5 candidates for the LLM.</a:t>
-            </a:r>
-          </a:p>
-          <a:p>
-            <a:pPr>
-              <a:spcAft>
-                <a:spcPts val="200"/>
-              </a:spcAft>
-              <a:defRPr sz="1500" b="1">
-                <a:solidFill>
-                  <a:srgbClr val="38BDF8"/>
-                </a:solidFill>
-                <a:latin typeface="Inter"/>
-              </a:defRPr>
-            </a:pPr>
-            <a:r>
-              <a:t>4. Native JSON Model &amp; Retry Loops:</a:t>
-            </a:r>
-          </a:p>
-          <a:p>
-            <a:pPr>
-              <a:spcAft>
-                <a:spcPts val="800"/>
-              </a:spcAft>
-              <a:defRPr sz="1300" b="0">
-                <a:solidFill>
-                  <a:srgbClr val="94A3B8"/>
-                </a:solidFill>
-                <a:latin typeface="Inter"/>
-              </a:defRPr>
-            </a:pPr>
-            <a:r>
-              <a:t>   Ollama processes candidate subset in JSON format; retries up to 3 times on parsing error.</a:t>
-            </a:r>
-          </a:p>
-          <a:p>
-            <a:pPr>
-              <a:spcAft>
-                <a:spcPts val="200"/>
-              </a:spcAft>
-              <a:defRPr sz="1500" b="1">
-                <a:solidFill>
-                  <a:srgbClr val="38BDF8"/>
-                </a:solidFill>
-                <a:latin typeface="Inter"/>
-              </a:defRPr>
-            </a:pPr>
-            <a:r>
-              <a:t>5. Double-Check and Atomic Move:</a:t>
-            </a:r>
-          </a:p>
-          <a:p>
-            <a:pPr>
-              <a:spcAft>
-                <a:spcPts val="0"/>
-              </a:spcAft>
-              <a:defRPr sz="1300" b="0">
-                <a:solidFill>
-                  <a:srgbClr val="94A3B8"/>
-                </a:solidFill>
-                <a:latin typeface="Inter"/>
-              </a:defRPr>
-            </a:pPr>
-            <a:r>
-              <a:t>   Verifies duplicate hash, renames semantically, and moves atomically.</a:t>
-            </a:r>
-          </a:p>
-        </p:txBody>
-      </p:sp>
-      <p:sp>
-        <p:nvSpPr>
-          <p:cNvPr id="4" name="TextBox 3"/>
-          <p:cNvSpPr txBox="1"/>
-          <p:nvPr/>
-        </p:nvSpPr>
-        <p:spPr>
-          <a:xfrm>
-            <a:off x="6583680" y="1371600"/>
-            <a:ext cx="4919472" cy="4754880"/>
-          </a:xfrm>
-          <a:prstGeom prst="rect">
-            <a:avLst/>
-          </a:prstGeom>
-          <a:noFill/>
-        </p:spPr>
-        <p:txBody>
-          <a:bodyPr wrap="square">
-            <a:spAutoFit/>
-          </a:bodyPr>
-          <a:lstStyle/>
-          <a:p>
-            <a:pPr>
-              <a:spcAft>
-                <a:spcPts val="1400"/>
-              </a:spcAft>
-              <a:defRPr sz="1200" b="1">
-                <a:solidFill>
-                  <a:srgbClr val="C084FC"/>
-                </a:solidFill>
-                <a:latin typeface="Consolas"/>
-              </a:defRPr>
-            </a:pPr>
-            <a:r>
-              <a:t>PIPELINES VISUALIZER</a:t>
-            </a:r>
-          </a:p>
-          <a:p>
-            <a:pPr algn="l">
-              <a:spcAft>
-                <a:spcPts val="400"/>
-              </a:spcAft>
-              <a:defRPr sz="1400" b="1">
-                <a:solidFill>
-                  <a:srgbClr val="38BDF8"/>
-                </a:solidFill>
-                <a:latin typeface="Consolas"/>
-              </a:defRPr>
-            </a:pPr>
-            <a:r>
-              <a:t>   [ WATCHDOG STABILITY CHECK ]</a:t>
-            </a:r>
-          </a:p>
-          <a:p>
-            <a:pPr algn="l">
-              <a:spcAft>
-                <a:spcPts val="400"/>
-              </a:spcAft>
-              <a:defRPr sz="1200" b="0">
-                <a:solidFill>
-                  <a:srgbClr val="94A3B8"/>
-                </a:solidFill>
-                <a:latin typeface="Consolas"/>
-              </a:defRPr>
-            </a:pPr>
-            <a:r>
-              <a:t>            ↓</a:t>
-            </a:r>
-          </a:p>
-          <a:p>
-            <a:pPr algn="l">
-              <a:spcAft>
-                <a:spcPts val="400"/>
-              </a:spcAft>
-              <a:defRPr sz="1400" b="1">
-                <a:solidFill>
-                  <a:srgbClr val="38BDF8"/>
-                </a:solidFill>
-                <a:latin typeface="Consolas"/>
-              </a:defRPr>
-            </a:pPr>
-            <a:r>
-              <a:t>   [ FAISS TAXONOMY PRE-FILTER ]</a:t>
-            </a:r>
-          </a:p>
-          <a:p>
-            <a:pPr algn="l">
-              <a:spcAft>
-                <a:spcPts val="400"/>
-              </a:spcAft>
-              <a:defRPr sz="1200" b="0">
-                <a:solidFill>
-                  <a:srgbClr val="94A3B8"/>
-                </a:solidFill>
-                <a:latin typeface="Consolas"/>
-              </a:defRPr>
-            </a:pPr>
-            <a:r>
-              <a:t>            ↓</a:t>
-            </a:r>
-          </a:p>
-          <a:p>
-            <a:pPr algn="l">
-              <a:spcAft>
-                <a:spcPts val="400"/>
-              </a:spcAft>
-              <a:defRPr sz="1400" b="1">
-                <a:solidFill>
-                  <a:srgbClr val="38BDF8"/>
-                </a:solidFill>
-                <a:latin typeface="Consolas"/>
-              </a:defRPr>
-            </a:pPr>
-            <a:r>
-              <a:t>   [ LLM ROUTING (NATIVE JSON MODE) ]</a:t>
-            </a:r>
-          </a:p>
-          <a:p>
-            <a:pPr algn="l">
-              <a:spcAft>
-                <a:spcPts val="400"/>
-              </a:spcAft>
-              <a:defRPr sz="1200" b="0">
-                <a:solidFill>
-                  <a:srgbClr val="94A3B8"/>
-                </a:solidFill>
-                <a:latin typeface="Consolas"/>
-              </a:defRPr>
-            </a:pPr>
-            <a:r>
-              <a:t>            ↓</a:t>
-            </a:r>
-          </a:p>
-          <a:p>
-            <a:pPr>
-              <a:spcAft>
-                <a:spcPts val="0"/>
-              </a:spcAft>
-              <a:defRPr sz="1400" b="1">
-                <a:solidFill>
-                  <a:srgbClr val="C084FC"/>
-                </a:solidFill>
-                <a:latin typeface="Consolas"/>
-              </a:defRPr>
-            </a:pPr>
-            <a:r>
-              <a:t>   [ ATOMIC MOVE &amp; LOGGING ]</a:t>
-            </a:r>
-          </a:p>
-        </p:txBody>
-      </p:sp>
-    </p:spTree>
-  </p:cSld>
-  <p:clrMapOvr>
-    <a:masterClrMapping/>
-  </p:clrMapOvr>
-</p:sld>
-</file>
-
-<file path=ppt/slides/slide5.xml><?xml version="1.0" encoding="utf-8"?>
-<p:sld xmlns:a="http://schemas.openxmlformats.org/drawingml/2006/main" xmlns:p="http://schemas.openxmlformats.org/presentationml/2006/main" xmlns:r="http://schemas.openxmlformats.org/officeDocument/2006/relationships">
-  <p:cSld>
-    <p:bg>
-      <p:bgPr>
-        <a:solidFill>
-          <a:srgbClr val="0B0F19"/>
-        </a:solidFill>
-        <a:effectLst/>
-      </p:bgPr>
-    </p:bg>
-    <p:spTree>
-      <p:nvGrpSpPr>
-        <p:cNvPr id="1" name=""/>
-        <p:cNvGrpSpPr/>
-        <p:nvPr/>
-      </p:nvGrpSpPr>
-      <p:grpSpPr/>
-      <p:sp>
-        <p:nvSpPr>
-          <p:cNvPr id="2" name="TextBox 1"/>
-          <p:cNvSpPr txBox="1"/>
-          <p:nvPr/>
-        </p:nvSpPr>
-        <p:spPr>
-          <a:xfrm>
-            <a:off x="685800" y="457200"/>
-            <a:ext cx="10817352" cy="731520"/>
-          </a:xfrm>
-          <a:prstGeom prst="rect">
-            <a:avLst/>
-          </a:prstGeom>
-          <a:noFill/>
-        </p:spPr>
-        <p:txBody>
-          <a:bodyPr wrap="square" lIns="0" tIns="0" bIns="0" rIns="0">
-            <a:spAutoFit/>
-          </a:bodyPr>
-          <a:lstStyle/>
-          <a:p>
-            <a:pPr>
-              <a:defRPr sz="3200" b="1">
-                <a:solidFill>
-                  <a:srgbClr val="38BDF8"/>
-                </a:solidFill>
-                <a:latin typeface="Inter"/>
-              </a:defRPr>
-            </a:pPr>
-            <a:r>
-              <a:t>New in Version 1.3</a:t>
-            </a:r>
-          </a:p>
-        </p:txBody>
-      </p:sp>
-      <p:sp>
-        <p:nvSpPr>
-          <p:cNvPr id="3" name="Rounded Rectangle 2"/>
-          <p:cNvSpPr/>
-          <p:nvPr/>
-        </p:nvSpPr>
-        <p:spPr>
-          <a:xfrm>
-            <a:off x="685800" y="1463040"/>
-            <a:ext cx="5120640" cy="2103120"/>
-          </a:xfrm>
-          <a:prstGeom prst="roundRect">
-            <a:avLst/>
-          </a:prstGeom>
-          <a:solidFill>
-            <a:srgbClr val="161D30"/>
-          </a:solidFill>
-          <a:ln>
-            <a:solidFill>
-              <a:srgbClr val="28324B"/>
-            </a:solidFill>
-          </a:ln>
-        </p:spPr>
-        <p:style>
-          <a:lnRef idx="1">
-            <a:schemeClr val="accent1"/>
-          </a:lnRef>
-          <a:fillRef idx="3">
-            <a:schemeClr val="accent1"/>
-          </a:fillRef>
-          <a:effectRef idx="2">
-            <a:schemeClr val="accent1"/>
-          </a:effectRef>
-          <a:fontRef idx="minor">
-            <a:schemeClr val="lt1"/>
-          </a:fontRef>
-        </p:style>
-        <p:txBody>
-          <a:bodyPr rtlCol="0" anchor="ctr"/>
-          <a:lstStyle/>
-          <a:p>
-            <a:pPr algn="ctr"/>
-          </a:p>
-        </p:txBody>
-      </p:sp>
-      <p:sp>
-        <p:nvSpPr>
-          <p:cNvPr id="4" name="TextBox 3"/>
-          <p:cNvSpPr txBox="1"/>
-          <p:nvPr/>
-        </p:nvSpPr>
-        <p:spPr>
-          <a:xfrm>
-            <a:off x="868680" y="1645920"/>
-            <a:ext cx="4754880" cy="1737360"/>
-          </a:xfrm>
-          <a:prstGeom prst="rect">
-            <a:avLst/>
-          </a:prstGeom>
-          <a:noFill/>
-        </p:spPr>
-        <p:txBody>
-          <a:bodyPr wrap="square">
-            <a:spAutoFit/>
-          </a:bodyPr>
-          <a:lstStyle/>
-          <a:p>
-            <a:pPr>
-              <a:spcAft>
-                <a:spcPts val="600"/>
-              </a:spcAft>
-              <a:defRPr sz="1600" b="1">
-                <a:solidFill>
-                  <a:srgbClr val="38BDF8"/>
-                </a:solidFill>
-                <a:latin typeface="Inter"/>
-              </a:defRPr>
-            </a:pPr>
-            <a:r>
-              <a:t>1. Single-Instance Execution Lock</a:t>
-            </a:r>
-          </a:p>
-          <a:p>
-            <a:pPr>
-              <a:spcAft>
-                <a:spcPts val="0"/>
-              </a:spcAft>
-              <a:defRPr sz="1300" b="0">
-                <a:solidFill>
-                  <a:srgbClr val="94A3B8"/>
-                </a:solidFill>
-                <a:latin typeface="Inter"/>
-              </a:defRPr>
-            </a:pPr>
-            <a:r>
-              <a:t>Uses Windows msvcrt.locking on lafo.lock to prevent multiple orchestrator instances from running simultaneously, blocking duplicate file-move operations.</a:t>
-            </a:r>
-          </a:p>
-        </p:txBody>
-      </p:sp>
-      <p:sp>
-        <p:nvSpPr>
-          <p:cNvPr id="5" name="Rounded Rectangle 4"/>
-          <p:cNvSpPr/>
-          <p:nvPr/>
-        </p:nvSpPr>
-        <p:spPr>
-          <a:xfrm>
-            <a:off x="6382512" y="1463040"/>
-            <a:ext cx="5120640" cy="2103120"/>
-          </a:xfrm>
-          <a:prstGeom prst="roundRect">
-            <a:avLst/>
-          </a:prstGeom>
-          <a:solidFill>
-            <a:srgbClr val="161D30"/>
-          </a:solidFill>
-          <a:ln>
-            <a:solidFill>
-              <a:srgbClr val="28324B"/>
-            </a:solidFill>
-          </a:ln>
-        </p:spPr>
-        <p:style>
-          <a:lnRef idx="1">
-            <a:schemeClr val="accent1"/>
-          </a:lnRef>
-          <a:fillRef idx="3">
-            <a:schemeClr val="accent1"/>
-          </a:fillRef>
-          <a:effectRef idx="2">
-            <a:schemeClr val="accent1"/>
-          </a:effectRef>
-          <a:fontRef idx="minor">
-            <a:schemeClr val="lt1"/>
-          </a:fontRef>
-        </p:style>
-        <p:txBody>
-          <a:bodyPr rtlCol="0" anchor="ctr"/>
-          <a:lstStyle/>
-          <a:p>
-            <a:pPr algn="ctr"/>
-          </a:p>
-        </p:txBody>
-      </p:sp>
-      <p:sp>
-        <p:nvSpPr>
-          <p:cNvPr id="6" name="TextBox 5"/>
-          <p:cNvSpPr txBox="1"/>
-          <p:nvPr/>
-        </p:nvSpPr>
-        <p:spPr>
-          <a:xfrm>
-            <a:off x="6565392" y="1645920"/>
-            <a:ext cx="4754880" cy="1737360"/>
-          </a:xfrm>
-          <a:prstGeom prst="rect">
-            <a:avLst/>
-          </a:prstGeom>
-          <a:noFill/>
-        </p:spPr>
-        <p:txBody>
-          <a:bodyPr wrap="square">
-            <a:spAutoFit/>
-          </a:bodyPr>
-          <a:lstStyle/>
-          <a:p>
-            <a:pPr>
-              <a:spcAft>
-                <a:spcPts val="600"/>
-              </a:spcAft>
-              <a:defRPr sz="1600" b="1">
-                <a:solidFill>
-                  <a:srgbClr val="38BDF8"/>
-                </a:solidFill>
-                <a:latin typeface="Inter"/>
-              </a:defRPr>
-            </a:pPr>
-            <a:r>
-              <a:t>2. Vector Candidate Pre-Filtering</a:t>
-            </a:r>
-          </a:p>
-          <a:p>
-            <a:pPr>
-              <a:spcAft>
-                <a:spcPts val="0"/>
-              </a:spcAft>
-              <a:defRPr sz="1300" b="0">
-                <a:solidFill>
-                  <a:srgbClr val="94A3B8"/>
-                </a:solidFill>
-                <a:latin typeface="Inter"/>
-              </a:defRPr>
-            </a:pPr>
-            <a:r>
-              <a:t>Narrow down categories from 302 to top 3-5 candidates via local similarity search before prompting the LLM, reducing CPU context by 20x and stopping timeouts.</a:t>
-            </a:r>
-          </a:p>
-        </p:txBody>
-      </p:sp>
-      <p:sp>
-        <p:nvSpPr>
-          <p:cNvPr id="7" name="Rounded Rectangle 6"/>
-          <p:cNvSpPr/>
-          <p:nvPr/>
-        </p:nvSpPr>
-        <p:spPr>
-          <a:xfrm>
-            <a:off x="685800" y="3931920"/>
-            <a:ext cx="5120640" cy="2103120"/>
-          </a:xfrm>
-          <a:prstGeom prst="roundRect">
-            <a:avLst/>
-          </a:prstGeom>
-          <a:solidFill>
-            <a:srgbClr val="161D30"/>
-          </a:solidFill>
-          <a:ln>
-            <a:solidFill>
-              <a:srgbClr val="28324B"/>
-            </a:solidFill>
-          </a:ln>
-        </p:spPr>
-        <p:style>
-          <a:lnRef idx="1">
-            <a:schemeClr val="accent1"/>
-          </a:lnRef>
-          <a:fillRef idx="3">
-            <a:schemeClr val="accent1"/>
-          </a:fillRef>
-          <a:effectRef idx="2">
-            <a:schemeClr val="accent1"/>
-          </a:effectRef>
-          <a:fontRef idx="minor">
-            <a:schemeClr val="lt1"/>
-          </a:fontRef>
-        </p:style>
-        <p:txBody>
-          <a:bodyPr rtlCol="0" anchor="ctr"/>
-          <a:lstStyle/>
-          <a:p>
-            <a:pPr algn="ctr"/>
-          </a:p>
-        </p:txBody>
-      </p:sp>
-      <p:sp>
-        <p:nvSpPr>
-          <p:cNvPr id="8" name="TextBox 7"/>
-          <p:cNvSpPr txBox="1"/>
-          <p:nvPr/>
-        </p:nvSpPr>
-        <p:spPr>
-          <a:xfrm>
-            <a:off x="868680" y="4114800"/>
-            <a:ext cx="4754880" cy="1737360"/>
-          </a:xfrm>
-          <a:prstGeom prst="rect">
-            <a:avLst/>
-          </a:prstGeom>
-          <a:noFill/>
-        </p:spPr>
-        <p:txBody>
-          <a:bodyPr wrap="square">
-            <a:spAutoFit/>
-          </a:bodyPr>
-          <a:lstStyle/>
-          <a:p>
-            <a:pPr>
-              <a:spcAft>
-                <a:spcPts val="600"/>
-              </a:spcAft>
-              <a:defRPr sz="1600" b="1">
-                <a:solidFill>
-                  <a:srgbClr val="38BDF8"/>
-                </a:solidFill>
-                <a:latin typeface="Inter"/>
-              </a:defRPr>
-            </a:pPr>
-            <a:r>
-              <a:t>3. Exemplar-Based File Indexing</a:t>
-            </a:r>
-          </a:p>
-          <a:p>
-            <a:pPr>
-              <a:spcAft>
-                <a:spcPts val="0"/>
-              </a:spcAft>
-              <a:defRPr sz="1300" b="0">
-                <a:solidFill>
-                  <a:srgbClr val="94A3B8"/>
-                </a:solidFill>
-                <a:latin typeface="Inter"/>
-              </a:defRPr>
-            </a:pPr>
-            <a:r>
-              <a:t>Indexes the first 15 files in target folders as semantic 'exemplars' inside the FAISS database. Learns your established naming and sorting patterns dynamically.</a:t>
-            </a:r>
-          </a:p>
-        </p:txBody>
-      </p:sp>
-      <p:sp>
-        <p:nvSpPr>
-          <p:cNvPr id="9" name="Rounded Rectangle 8"/>
-          <p:cNvSpPr/>
-          <p:nvPr/>
-        </p:nvSpPr>
-        <p:spPr>
-          <a:xfrm>
-            <a:off x="6382512" y="3931920"/>
-            <a:ext cx="5120640" cy="2103120"/>
-          </a:xfrm>
-          <a:prstGeom prst="roundRect">
-            <a:avLst/>
-          </a:prstGeom>
-          <a:solidFill>
-            <a:srgbClr val="161D30"/>
-          </a:solidFill>
-          <a:ln>
-            <a:solidFill>
-              <a:srgbClr val="28324B"/>
-            </a:solidFill>
-          </a:ln>
-        </p:spPr>
-        <p:style>
-          <a:lnRef idx="1">
-            <a:schemeClr val="accent1"/>
-          </a:lnRef>
-          <a:fillRef idx="3">
-            <a:schemeClr val="accent1"/>
-          </a:fillRef>
-          <a:effectRef idx="2">
-            <a:schemeClr val="accent1"/>
-          </a:effectRef>
-          <a:fontRef idx="minor">
-            <a:schemeClr val="lt1"/>
-          </a:fontRef>
-        </p:style>
-        <p:txBody>
-          <a:bodyPr rtlCol="0" anchor="ctr"/>
-          <a:lstStyle/>
-          <a:p>
-            <a:pPr algn="ctr"/>
-          </a:p>
-        </p:txBody>
-      </p:sp>
-      <p:sp>
-        <p:nvSpPr>
-          <p:cNvPr id="10" name="TextBox 9"/>
-          <p:cNvSpPr txBox="1"/>
-          <p:nvPr/>
-        </p:nvSpPr>
-        <p:spPr>
-          <a:xfrm>
-            <a:off x="6565392" y="4114800"/>
-            <a:ext cx="4754880" cy="1737360"/>
-          </a:xfrm>
-          <a:prstGeom prst="rect">
-            <a:avLst/>
-          </a:prstGeom>
-          <a:noFill/>
-        </p:spPr>
-        <p:txBody>
-          <a:bodyPr wrap="square">
-            <a:spAutoFit/>
-          </a:bodyPr>
-          <a:lstStyle/>
-          <a:p>
-            <a:pPr>
-              <a:spcAft>
-                <a:spcPts val="600"/>
-              </a:spcAft>
-              <a:defRPr sz="1600" b="1">
-                <a:solidFill>
-                  <a:srgbClr val="38BDF8"/>
-                </a:solidFill>
-                <a:latin typeface="Inter"/>
-              </a:defRPr>
-            </a:pPr>
-            <a:r>
-              <a:t>4. Failure Quarantining</a:t>
-            </a:r>
-          </a:p>
-          <a:p>
-            <a:pPr>
-              <a:spcAft>
-                <a:spcPts val="0"/>
-              </a:spcAft>
-              <a:defRPr sz="1300" b="0">
-                <a:solidFill>
-                  <a:srgbClr val="94A3B8"/>
-                </a:solidFill>
-                <a:latin typeface="Inter"/>
-              </a:defRPr>
-            </a:pPr>
-            <a:r>
-              <a:t>Documents failing classification after 3 retry loops are quarantined and routed to Unsorted_Review folder instead of clogging the monitored Downloads directory.</a:t>
-            </a:r>
-          </a:p>
-        </p:txBody>
-      </p:sp>
-    </p:spTree>
-  </p:cSld>
-  <p:clrMapOvr>
-    <a:masterClrMapping/>
-  </p:clrMapOvr>
-</p:sld>
-</file>
-
-<file path=ppt/slides/slide6.xml><?xml version="1.0" encoding="utf-8"?>
-<p:sld xmlns:a="http://schemas.openxmlformats.org/drawingml/2006/main" xmlns:p="http://schemas.openxmlformats.org/presentationml/2006/main" xmlns:r="http://schemas.openxmlformats.org/officeDocument/2006/relationships">
-  <p:cSld>
-    <p:bg>
-      <p:bgPr>
-        <a:solidFill>
-          <a:srgbClr val="0B0F19"/>
-        </a:solidFill>
-        <a:effectLst/>
-      </p:bgPr>
-    </p:bg>
-    <p:spTree>
-      <p:nvGrpSpPr>
-        <p:cNvPr id="1" name=""/>
-        <p:cNvGrpSpPr/>
-        <p:nvPr/>
-      </p:nvGrpSpPr>
-      <p:grpSpPr/>
-      <p:sp>
-        <p:nvSpPr>
-          <p:cNvPr id="2" name="TextBox 1"/>
-          <p:cNvSpPr txBox="1"/>
-          <p:nvPr/>
-        </p:nvSpPr>
-        <p:spPr>
-          <a:xfrm>
-            <a:off x="685800" y="457200"/>
-            <a:ext cx="10817352" cy="731520"/>
-          </a:xfrm>
-          <a:prstGeom prst="rect">
-            <a:avLst/>
-          </a:prstGeom>
-          <a:noFill/>
-        </p:spPr>
-        <p:txBody>
-          <a:bodyPr wrap="square" lIns="0" tIns="0" bIns="0" rIns="0">
-            <a:spAutoFit/>
-          </a:bodyPr>
-          <a:lstStyle/>
-          <a:p>
-            <a:pPr>
-              <a:defRPr sz="3200" b="1">
-                <a:solidFill>
-                  <a:srgbClr val="38BDF8"/>
-                </a:solidFill>
-                <a:latin typeface="Inter"/>
-              </a:defRPr>
-            </a:pPr>
-            <a:r>
-              <a:t>Concurrency &amp; GPU Optimizations</a:t>
-            </a:r>
-          </a:p>
-        </p:txBody>
-      </p:sp>
-      <p:sp>
-        <p:nvSpPr>
-          <p:cNvPr id="3" name="TextBox 2"/>
-          <p:cNvSpPr txBox="1"/>
-          <p:nvPr/>
-        </p:nvSpPr>
-        <p:spPr>
-          <a:xfrm>
-            <a:off x="685800" y="1463040"/>
-            <a:ext cx="5486400" cy="4572000"/>
-          </a:xfrm>
-          <a:prstGeom prst="rect">
-            <a:avLst/>
-          </a:prstGeom>
-          <a:noFill/>
-        </p:spPr>
-        <p:txBody>
-          <a:bodyPr wrap="square">
-            <a:spAutoFit/>
-          </a:bodyPr>
-          <a:lstStyle/>
-          <a:p>
-            <a:pPr>
-              <a:spcAft>
-                <a:spcPts val="1600"/>
-              </a:spcAft>
-              <a:defRPr sz="1800" b="0">
-                <a:solidFill>
-                  <a:srgbClr val="F1F5F9"/>
-                </a:solidFill>
-                <a:latin typeface="Inter"/>
-              </a:defRPr>
-            </a:pPr>
-            <a:r>
-              <a:t>LAFO leverages multithreading for maximum responsiveness:</a:t>
-            </a:r>
-          </a:p>
-          <a:p>
-            <a:pPr>
-              <a:spcAft>
-                <a:spcPts val="400"/>
-              </a:spcAft>
-              <a:defRPr sz="1600" b="1">
-                <a:solidFill>
-                  <a:srgbClr val="C084FC"/>
-                </a:solidFill>
-                <a:latin typeface="Inter"/>
-              </a:defRPr>
-            </a:pPr>
-            <a:r>
-              <a:t>• ThreadPoolExecutor Workers</a:t>
-            </a:r>
-          </a:p>
-          <a:p>
-            <a:pPr>
-              <a:spcAft>
-                <a:spcPts val="1400"/>
-              </a:spcAft>
-              <a:defRPr sz="1400" b="0">
-                <a:solidFill>
-                  <a:srgbClr val="94A3B8"/>
-                </a:solidFill>
-                <a:latin typeface="Inter"/>
-              </a:defRPr>
-            </a:pPr>
-            <a:r>
-              <a:t>  Dispatches file tasks to a background thread pool (default 4 workers) so browser download transactions are never blocked.</a:t>
-            </a:r>
-          </a:p>
-          <a:p>
-            <a:pPr>
-              <a:spcAft>
-                <a:spcPts val="400"/>
-              </a:spcAft>
-              <a:defRPr sz="1600" b="1">
-                <a:solidFill>
-                  <a:srgbClr val="C084FC"/>
-                </a:solidFill>
-                <a:latin typeface="Inter"/>
-              </a:defRPr>
-            </a:pPr>
-            <a:r>
-              <a:t>• Concurrency Locks</a:t>
-            </a:r>
-          </a:p>
-          <a:p>
-            <a:pPr>
-              <a:spcAft>
-                <a:spcPts val="1400"/>
-              </a:spcAft>
-              <a:defRPr sz="1400" b="0">
-                <a:solidFill>
-                  <a:srgbClr val="94A3B8"/>
-                </a:solidFill>
-                <a:latin typeface="Inter"/>
-              </a:defRPr>
-            </a:pPr>
-            <a:r>
-              <a:t>  Protects stats updates, log entries, and filesystem transactions using mutex locks (`stats_lock`, `file_op_lock`) to prevent race condition write errors.</a:t>
-            </a:r>
-          </a:p>
-          <a:p>
-            <a:pPr>
-              <a:spcAft>
-                <a:spcPts val="400"/>
-              </a:spcAft>
-              <a:defRPr sz="1600" b="1">
-                <a:solidFill>
-                  <a:srgbClr val="C084FC"/>
-                </a:solidFill>
-                <a:latin typeface="Inter"/>
-              </a:defRPr>
-            </a:pPr>
-            <a:r>
-              <a:t>• CUDA Hardware Acceleration</a:t>
-            </a:r>
-          </a:p>
-          <a:p>
-            <a:pPr>
-              <a:spcAft>
-                <a:spcPts val="0"/>
-              </a:spcAft>
-              <a:defRPr sz="1400" b="0">
-                <a:solidFill>
-                  <a:srgbClr val="94A3B8"/>
-                </a:solidFill>
-                <a:latin typeface="Inter"/>
-              </a:defRPr>
-            </a:pPr>
-            <a:r>
-              <a:t>  Automatically checks for PyTorch GPU/CUDA drivers. Runs embedding calculations locally on hardware when available, falling back safely to CPU.</a:t>
-            </a:r>
-          </a:p>
-        </p:txBody>
-      </p:sp>
-      <p:sp>
-        <p:nvSpPr>
-          <p:cNvPr id="4" name="Rounded Rectangle 3"/>
-          <p:cNvSpPr/>
-          <p:nvPr/>
-        </p:nvSpPr>
-        <p:spPr>
-          <a:xfrm>
-            <a:off x="6583680" y="1645920"/>
-            <a:ext cx="4919472" cy="4114800"/>
-          </a:xfrm>
-          <a:prstGeom prst="roundRect">
-            <a:avLst/>
-          </a:prstGeom>
-          <a:solidFill>
-            <a:srgbClr val="161D30"/>
-          </a:solidFill>
-          <a:ln>
-            <a:solidFill>
-              <a:srgbClr val="28324B"/>
-            </a:solidFill>
-          </a:ln>
-        </p:spPr>
-        <p:style>
-          <a:lnRef idx="1">
-            <a:schemeClr val="accent1"/>
-          </a:lnRef>
-          <a:fillRef idx="3">
-            <a:schemeClr val="accent1"/>
-          </a:fillRef>
-          <a:effectRef idx="2">
-            <a:schemeClr val="accent1"/>
-          </a:effectRef>
-          <a:fontRef idx="minor">
-            <a:schemeClr val="lt1"/>
-          </a:fontRef>
-        </p:style>
-        <p:txBody>
-          <a:bodyPr rtlCol="0" anchor="ctr"/>
-          <a:lstStyle/>
-          <a:p>
-            <a:pPr algn="ctr"/>
-          </a:p>
-        </p:txBody>
-      </p:sp>
-      <p:sp>
-        <p:nvSpPr>
-          <p:cNvPr id="5" name="TextBox 4"/>
-          <p:cNvSpPr txBox="1"/>
-          <p:nvPr/>
-        </p:nvSpPr>
-        <p:spPr>
-          <a:xfrm>
-            <a:off x="6720840" y="1828800"/>
-            <a:ext cx="4645152" cy="3749039"/>
-          </a:xfrm>
-          <a:prstGeom prst="rect">
-            <a:avLst/>
-          </a:prstGeom>
-          <a:noFill/>
-        </p:spPr>
-        <p:txBody>
-          <a:bodyPr wrap="square">
-            <a:spAutoFit/>
-          </a:bodyPr>
-          <a:lstStyle/>
-          <a:p>
-            <a:pPr>
-              <a:spcAft>
-                <a:spcPts val="1000"/>
-              </a:spcAft>
-              <a:defRPr sz="1200" b="1">
-                <a:solidFill>
-                  <a:srgbClr val="38BDF8"/>
-                </a:solidFill>
-                <a:latin typeface="Consolas"/>
-              </a:defRPr>
-            </a:pPr>
-            <a:r>
-              <a:t>THREAD SAFE OPERATIONS (main.py)</a:t>
-            </a:r>
-          </a:p>
-          <a:p>
-            <a:pPr>
-              <a:spcAft>
-                <a:spcPts val="1600"/>
-              </a:spcAft>
-              <a:defRPr sz="1150" b="0">
-                <a:solidFill>
-                  <a:srgbClr val="F1F5F9"/>
-                </a:solidFill>
-                <a:latin typeface="Consolas"/>
-              </a:defRPr>
-            </a:pPr>
-            <a:r>
-              <a:t>def process_file(self, file_path):</a:t>
-            </a:r>
-            <a:br/>
-            <a:r>
-              <a:t>    # ... extract text</a:t>
-            </a:r>
-            <a:br/>
-            <a:r>
-              <a:t>    # ... pre-filter candidates</a:t>
-            </a:r>
-            <a:br/>
-            <a:r>
-              <a:t>    # ... classify</a:t>
-            </a:r>
-            <a:br/>
-            <a:r>
-              <a:t>    with self.file_op_lock:</a:t>
-            </a:r>
-            <a:br/>
-            <a:r>
-              <a:t>        # Verify duplicate SHA-256 hash</a:t>
-            </a:r>
-            <a:br/>
-            <a:r>
-              <a:t>        # Move file atomically</a:t>
-            </a:r>
-            <a:br/>
-            <a:r>
-              <a:t>        # Log SUCCESS to execution.log</a:t>
-            </a:r>
-          </a:p>
-          <a:p>
-            <a:pPr>
-              <a:spcAft>
-                <a:spcPts val="1000"/>
-              </a:spcAft>
-              <a:defRPr sz="1200" b="1">
-                <a:solidFill>
-                  <a:srgbClr val="C084FC"/>
-                </a:solidFill>
-                <a:latin typeface="Consolas"/>
-              </a:defRPr>
-            </a:pPr>
-            <a:r>
-              <a:t>CUDA DEVICE DETECT (vector_store.py)</a:t>
-            </a:r>
-          </a:p>
-          <a:p>
-            <a:pPr>
-              <a:spcAft>
-                <a:spcPts val="0"/>
-              </a:spcAft>
-              <a:defRPr sz="1150" b="0">
-                <a:solidFill>
-                  <a:srgbClr val="F1F5F9"/>
-                </a:solidFill>
-                <a:latin typeface="Consolas"/>
-              </a:defRPr>
-            </a:pPr>
-            <a:r>
-              <a:t>device = 'cuda' if torch.cuda.is_available() \</a:t>
-            </a:r>
-            <a:br/>
-            <a:r>
-              <a:t>         else 'cpu'</a:t>
-            </a:r>
-            <a:br/>
-            <a:r>
-              <a:t>self.embeddings = HuggingFaceEmbeddings(</a:t>
-            </a:r>
-            <a:br/>
-            <a:r>
-              <a:t>    model_name=EMBEDDING_MODEL,</a:t>
-            </a:r>
-            <a:br/>
-            <a:r>
-              <a:t>    model_kwargs={'device': device}</a:t>
-            </a:r>
-            <a:br/>
-            <a:r>
-              <a:t>)</a:t>
-            </a:r>
-          </a:p>
-        </p:txBody>
-      </p:sp>
-    </p:spTree>
-  </p:cSld>
-  <p:clrMapOvr>
-    <a:masterClrMapping/>
-  </p:clrMapOvr>
-</p:sld>
-</file>
-
-<file path=ppt/slides/slide7.xml><?xml version="1.0" encoding="utf-8"?>
-<p:sld xmlns:a="http://schemas.openxmlformats.org/drawingml/2006/main" xmlns:p="http://schemas.openxmlformats.org/presentationml/2006/main" xmlns:r="http://schemas.openxmlformats.org/officeDocument/2006/relationships">
-  <p:cSld>
-    <p:bg>
-      <p:bgPr>
-        <a:solidFill>
-          <a:srgbClr val="0B0F19"/>
-        </a:solidFill>
-        <a:effectLst/>
-      </p:bgPr>
-    </p:bg>
-    <p:spTree>
-      <p:nvGrpSpPr>
-        <p:cNvPr id="1" name=""/>
-        <p:cNvGrpSpPr/>
-        <p:nvPr/>
-      </p:nvGrpSpPr>
-      <p:grpSpPr/>
-      <p:sp>
-        <p:nvSpPr>
-          <p:cNvPr id="2" name="TextBox 1"/>
-          <p:cNvSpPr txBox="1"/>
-          <p:nvPr/>
-        </p:nvSpPr>
-        <p:spPr>
-          <a:xfrm>
-            <a:off x="685800" y="457200"/>
-            <a:ext cx="10817352" cy="731520"/>
-          </a:xfrm>
-          <a:prstGeom prst="rect">
-            <a:avLst/>
-          </a:prstGeom>
-          <a:noFill/>
-        </p:spPr>
-        <p:txBody>
-          <a:bodyPr wrap="square" lIns="0" tIns="0" bIns="0" rIns="0">
-            <a:spAutoFit/>
-          </a:bodyPr>
-          <a:lstStyle/>
-          <a:p>
-            <a:pPr>
-              <a:defRPr sz="3200" b="1">
-                <a:solidFill>
-                  <a:srgbClr val="38BDF8"/>
-                </a:solidFill>
-                <a:latin typeface="Inter"/>
-              </a:defRPr>
-            </a:pPr>
-            <a:r>
-              <a:t>Windows Startup Integration</a:t>
-            </a:r>
-          </a:p>
-        </p:txBody>
-      </p:sp>
-      <p:sp>
-        <p:nvSpPr>
-          <p:cNvPr id="3" name="TextBox 2"/>
-          <p:cNvSpPr txBox="1"/>
-          <p:nvPr/>
-        </p:nvSpPr>
-        <p:spPr>
-          <a:xfrm>
-            <a:off x="685800" y="1463040"/>
-            <a:ext cx="5486400" cy="4572000"/>
-          </a:xfrm>
-          <a:prstGeom prst="rect">
-            <a:avLst/>
-          </a:prstGeom>
-          <a:noFill/>
-        </p:spPr>
-        <p:txBody>
-          <a:bodyPr wrap="square">
-            <a:spAutoFit/>
-          </a:bodyPr>
-          <a:lstStyle/>
-          <a:p>
-            <a:pPr>
-              <a:spcAft>
-                <a:spcPts val="1600"/>
-              </a:spcAft>
-              <a:defRPr sz="1800" b="0">
-                <a:solidFill>
-                  <a:srgbClr val="F1F5F9"/>
-                </a:solidFill>
-                <a:latin typeface="Inter"/>
-              </a:defRPr>
-            </a:pPr>
-            <a:r>
-              <a:t>Automated PowerShell installers manage continuous service runs:</a:t>
-            </a:r>
-          </a:p>
-          <a:p>
-            <a:pPr>
-              <a:spcAft>
-                <a:spcPts val="400"/>
-              </a:spcAft>
-              <a:defRPr sz="1600" b="1">
-                <a:solidFill>
-                  <a:srgbClr val="38BDF8"/>
-                </a:solidFill>
-                <a:latin typeface="Inter"/>
-              </a:defRPr>
-            </a:pPr>
-            <a:r>
-              <a:t>• register_startup.ps1</a:t>
-            </a:r>
-          </a:p>
-          <a:p>
-            <a:pPr>
-              <a:spcAft>
-                <a:spcPts val="1400"/>
-              </a:spcAft>
-              <a:defRPr sz="1400" b="0">
-                <a:solidFill>
-                  <a:srgbClr val="94A3B8"/>
-                </a:solidFill>
-                <a:latin typeface="Inter"/>
-              </a:defRPr>
-            </a:pPr>
-            <a:r>
-              <a:t>  Creates a logon shortcut in the Windows Startup directory that runs powershell.exe with a hidden window, executing main.py silently in the background.</a:t>
-            </a:r>
-          </a:p>
-          <a:p>
-            <a:pPr>
-              <a:spcAft>
-                <a:spcPts val="400"/>
-              </a:spcAft>
-              <a:defRPr sz="1600" b="1">
-                <a:solidFill>
-                  <a:srgbClr val="38BDF8"/>
-                </a:solidFill>
-                <a:latin typeface="Inter"/>
-              </a:defRPr>
-            </a:pPr>
-            <a:r>
-              <a:t>• unregister_startup.ps1</a:t>
-            </a:r>
-          </a:p>
-          <a:p>
-            <a:pPr>
-              <a:spcAft>
-                <a:spcPts val="1400"/>
-              </a:spcAft>
-              <a:defRPr sz="1400" b="0">
-                <a:solidFill>
-                  <a:srgbClr val="94A3B8"/>
-                </a:solidFill>
-                <a:latin typeface="Inter"/>
-              </a:defRPr>
-            </a:pPr>
-            <a:r>
-              <a:t>  Instantly searches for running background python.exe processes executing main.py, terminates them, and deletes the Startup folder shortcut.</a:t>
-            </a:r>
-          </a:p>
-          <a:p>
-            <a:pPr>
-              <a:spcAft>
-                <a:spcPts val="400"/>
-              </a:spcAft>
-              <a:defRPr sz="1600" b="1">
-                <a:solidFill>
-                  <a:srgbClr val="38BDF8"/>
-                </a:solidFill>
-                <a:latin typeface="Inter"/>
-              </a:defRPr>
-            </a:pPr>
-            <a:r>
-              <a:t>• Dynamic Logs Folder</a:t>
-            </a:r>
-          </a:p>
-          <a:p>
-            <a:pPr>
-              <a:spcAft>
-                <a:spcPts val="0"/>
-              </a:spcAft>
-              <a:defRPr sz="1400" b="0">
-                <a:solidFill>
-                  <a:srgbClr val="94A3B8"/>
-                </a:solidFill>
-                <a:latin typeface="Inter"/>
-              </a:defRPr>
-            </a:pPr>
-            <a:r>
-              <a:t>  Creates logs and execution logs in C:\Users\...\Documents\LAFO logs, ensuring zero-pollution in project structures.</a:t>
-            </a:r>
-          </a:p>
-        </p:txBody>
-      </p:sp>
-      <p:sp>
-        <p:nvSpPr>
-          <p:cNvPr id="4" name="Rounded Rectangle 3"/>
-          <p:cNvSpPr/>
-          <p:nvPr/>
-        </p:nvSpPr>
-        <p:spPr>
-          <a:xfrm>
-            <a:off x="6583680" y="1645920"/>
-            <a:ext cx="4919472" cy="4114800"/>
-          </a:xfrm>
-          <a:prstGeom prst="roundRect">
-            <a:avLst/>
-          </a:prstGeom>
-          <a:solidFill>
-            <a:srgbClr val="161D30"/>
-          </a:solidFill>
-          <a:ln>
-            <a:solidFill>
-              <a:srgbClr val="28324B"/>
-            </a:solidFill>
-          </a:ln>
-        </p:spPr>
-        <p:style>
-          <a:lnRef idx="1">
-            <a:schemeClr val="accent1"/>
-          </a:lnRef>
-          <a:fillRef idx="3">
-            <a:schemeClr val="accent1"/>
-          </a:fillRef>
-          <a:effectRef idx="2">
-            <a:schemeClr val="accent1"/>
-          </a:effectRef>
-          <a:fontRef idx="minor">
-            <a:schemeClr val="lt1"/>
-          </a:fontRef>
-        </p:style>
-        <p:txBody>
-          <a:bodyPr rtlCol="0" anchor="ctr"/>
-          <a:lstStyle/>
-          <a:p>
-            <a:pPr algn="ctr"/>
-          </a:p>
-        </p:txBody>
-      </p:sp>
-      <p:sp>
-        <p:nvSpPr>
-          <p:cNvPr id="5" name="TextBox 4"/>
-          <p:cNvSpPr txBox="1"/>
-          <p:nvPr/>
-        </p:nvSpPr>
-        <p:spPr>
-          <a:xfrm>
-            <a:off x="6720840" y="2011680"/>
-            <a:ext cx="4645152" cy="3474720"/>
-          </a:xfrm>
-          <a:prstGeom prst="rect">
-            <a:avLst/>
-          </a:prstGeom>
-          <a:noFill/>
-        </p:spPr>
-        <p:txBody>
-          <a:bodyPr wrap="square">
-            <a:spAutoFit/>
-          </a:bodyPr>
-          <a:lstStyle/>
-          <a:p>
-            <a:pPr>
-              <a:spcAft>
-                <a:spcPts val="1400"/>
-              </a:spcAft>
-              <a:defRPr sz="1200" b="1">
-                <a:solidFill>
-                  <a:srgbClr val="22C55E"/>
-                </a:solidFill>
-                <a:latin typeface="Consolas"/>
-              </a:defRPr>
-            </a:pPr>
-            <a:r>
-              <a:t>POWERSHELL SERVICE DEPLOYMENT</a:t>
-            </a:r>
-          </a:p>
-          <a:p>
-            <a:pPr>
-              <a:spcAft>
-                <a:spcPts val="0"/>
-              </a:spcAft>
-              <a:defRPr sz="1200" b="0">
-                <a:solidFill>
-                  <a:srgbClr val="F1F5F9"/>
-                </a:solidFill>
-                <a:latin typeface="Consolas"/>
-              </a:defRPr>
-            </a:pPr>
-            <a:r>
-              <a:t># 1. Set Execution Policy</a:t>
-            </a:r>
-            <a:br/>
-            <a:r>
-              <a:t>Set-ExecutionPolicy Bypass -Scope Process</a:t>
-            </a:r>
-            <a:br/>
-            <a:br/>
-            <a:r>
-              <a:t># 2. Run background registration</a:t>
-            </a:r>
-            <a:br/>
-            <a:r>
-              <a:t>.\register_startup.ps1</a:t>
-            </a:r>
-            <a:br/>
-            <a:br/>
-            <a:r>
-              <a:t># 3. Check background status</a:t>
-            </a:r>
-            <a:br/>
-            <a:r>
-              <a:t>Get-CimInstance Win32_Process -Filter \</a:t>
-            </a:r>
-            <a:br/>
-            <a:r>
-              <a:t>'Name="python.exe" and CommandLine like "%main.py%"'</a:t>
-            </a:r>
-          </a:p>
-        </p:txBody>
-      </p:sp>
-    </p:spTree>
-  </p:cSld>
-  <p:clrMapOvr>
-    <a:masterClrMapping/>
-  </p:clrMapOvr>
-</p:sld>
-</file>
-
-<file path=ppt/slides/slide8.xml><?xml version="1.0" encoding="utf-8"?>
-<p:sld xmlns:a="http://schemas.openxmlformats.org/drawingml/2006/main" xmlns:p="http://schemas.openxmlformats.org/presentationml/2006/main" xmlns:r="http://schemas.openxmlformats.org/officeDocument/2006/relationships">
-  <p:cSld>
-    <p:bg>
-      <p:bgPr>
-        <a:solidFill>
-          <a:srgbClr val="0B0F19"/>
-        </a:solidFill>
-        <a:effectLst/>
-      </p:bgPr>
-    </p:bg>
-    <p:spTree>
-      <p:nvGrpSpPr>
-        <p:cNvPr id="1" name=""/>
-        <p:cNvGrpSpPr/>
-        <p:nvPr/>
-      </p:nvGrpSpPr>
-      <p:grpSpPr/>
-      <p:sp>
-        <p:nvSpPr>
-          <p:cNvPr id="2" name="Rectangle 1"/>
-          <p:cNvSpPr/>
-          <p:nvPr/>
-        </p:nvSpPr>
-        <p:spPr>
-          <a:xfrm>
-            <a:off x="1371600" y="1645920"/>
-            <a:ext cx="9445752" cy="3474720"/>
-          </a:xfrm>
-          <a:prstGeom prst="rect">
-            <a:avLst/>
-          </a:prstGeom>
-          <a:solidFill>
-            <a:srgbClr val="161D30"/>
-          </a:solidFill>
-          <a:ln w="19050">
-            <a:solidFill>
-              <a:srgbClr val="28324B"/>
-            </a:solidFill>
-          </a:ln>
-        </p:spPr>
-        <p:style>
-          <a:lnRef idx="1">
-            <a:schemeClr val="accent1"/>
-          </a:lnRef>
-          <a:fillRef idx="3">
-            <a:schemeClr val="accent1"/>
-          </a:fillRef>
-          <a:effectRef idx="2">
-            <a:schemeClr val="accent1"/>
-          </a:effectRef>
-          <a:fontRef idx="minor">
-            <a:schemeClr val="lt1"/>
-          </a:fontRef>
-        </p:style>
-        <p:txBody>
-          <a:bodyPr rtlCol="0" anchor="ctr"/>
-          <a:lstStyle/>
-          <a:p>
-            <a:pPr algn="ctr"/>
-          </a:p>
-        </p:txBody>
-      </p:sp>
-      <p:sp>
-        <p:nvSpPr>
-          <p:cNvPr id="3" name="TextBox 2"/>
-          <p:cNvSpPr txBox="1"/>
-          <p:nvPr/>
-        </p:nvSpPr>
-        <p:spPr>
-          <a:xfrm>
-            <a:off x="1828800" y="1920240"/>
-            <a:ext cx="8531352" cy="2926080"/>
-          </a:xfrm>
-          <a:prstGeom prst="rect">
-            <a:avLst/>
-          </a:prstGeom>
-          <a:noFill/>
-        </p:spPr>
-        <p:txBody>
-          <a:bodyPr wrap="square">
-            <a:spAutoFit/>
-          </a:bodyPr>
-          <a:lstStyle/>
-          <a:p>
-            <a:pPr>
-              <a:spcAft>
-                <a:spcPts val="800"/>
-              </a:spcAft>
-              <a:defRPr sz="1200" b="1">
-                <a:solidFill>
-                  <a:srgbClr val="22C55E"/>
-                </a:solidFill>
-                <a:latin typeface="Inter"/>
-              </a:defRPr>
-            </a:pPr>
-            <a:r>
-              <a:t>VERSION 1.3 RELESE-READY</a:t>
-            </a:r>
-          </a:p>
-          <a:p>
-            <a:pPr>
-              <a:spcAft>
-                <a:spcPts val="1600"/>
-              </a:spcAft>
-              <a:defRPr sz="4200" b="1">
-                <a:solidFill>
-                  <a:srgbClr val="38BDF8"/>
-                </a:solidFill>
-                <a:latin typeface="Inter"/>
-              </a:defRPr>
-            </a:pPr>
-            <a:r>
-              <a:t>LAFO Project Metrics</a:t>
-            </a:r>
-          </a:p>
-          <a:p>
-            <a:pPr>
-              <a:spcAft>
-                <a:spcPts val="2000"/>
-              </a:spcAft>
-              <a:defRPr sz="1400" b="1">
-                <a:solidFill>
-                  <a:srgbClr val="F1F5F9"/>
-                </a:solidFill>
-                <a:latin typeface="Consolas"/>
-              </a:defRPr>
-            </a:pPr>
-            <a:r>
-              <a:t>• 2,575 Lines of Core Code    |    • 2,200+ Lines of Technical Docs</a:t>
-            </a:r>
-            <a:br/>
-            <a:r>
-              <a:t>• 40+ Features Completed      |    • &lt;15s Processing Speed / File</a:t>
-            </a:r>
-            <a:br/>
-            <a:r>
-              <a:t>• 100% Local Privacy          |    • Windows Service Enabled</a:t>
-            </a:r>
-          </a:p>
-          <a:p>
-            <a:pPr>
-              <a:spcAft>
-                <a:spcPts val="0"/>
-              </a:spcAft>
-              <a:defRPr sz="1400" b="0">
-                <a:solidFill>
-                  <a:srgbClr val="94A3B8"/>
-                </a:solidFill>
-                <a:latin typeface="Inter"/>
-              </a:defRPr>
-            </a:pPr>
-            <a:r>
-              <a:t>Fully production-ready for automated, secure, and offline file organization.</a:t>
-            </a:r>
-          </a:p>
-        </p:txBody>
-      </p:sp>
-    </p:spTree>
-  </p:cSld>
-  <p:clrMapOvr>
-    <a:masterClrMapping/>
-  </p:clrMapOvr>
+  <p:transition spd="slow">
+    <p:wipe/>
+  </p:transition>
 </p:sld>
 </file>
 
